--- a/spacex-capstone/SpaceX_Capstone_Project_Report.pptx
+++ b/spacex-capstone/SpaceX_Capstone_Project_Report.pptx
@@ -8,7 +8,7 @@
     <p:notesMasterId r:id="rId4"/>
   </p:notesMasterIdLst>
   <p:handoutMasterIdLst>
-    <p:handoutMasterId r:id="rId17"/>
+    <p:handoutMasterId r:id="rId19"/>
   </p:handoutMasterIdLst>
   <p:sldIdLst>
     <p:sldId id="256" r:id="rId3"/>
@@ -19,11 +19,13 @@
     <p:sldId id="261" r:id="rId9"/>
     <p:sldId id="262" r:id="rId10"/>
     <p:sldId id="263" r:id="rId11"/>
-    <p:sldId id="264" r:id="rId12"/>
-    <p:sldId id="265" r:id="rId13"/>
-    <p:sldId id="266" r:id="rId14"/>
-    <p:sldId id="267" r:id="rId15"/>
-    <p:sldId id="268" r:id="rId16"/>
+    <p:sldId id="269" r:id="rId12"/>
+    <p:sldId id="270" r:id="rId13"/>
+    <p:sldId id="264" r:id="rId14"/>
+    <p:sldId id="265" r:id="rId15"/>
+    <p:sldId id="266" r:id="rId16"/>
+    <p:sldId id="267" r:id="rId17"/>
+    <p:sldId id="268" r:id="rId18"/>
   </p:sldIdLst>
   <p:sldSz cx="9144000" cy="5143500"/>
   <p:notesSz cx="5143500" cy="9144000"/>
@@ -4210,6 +4212,48 @@
 <file path=ppt/slides/slide10.xml><?xml version="1.0" encoding="utf-8"?>
 <p:sld xmlns:a="http://schemas.openxmlformats.org/drawingml/2006/main" xmlns:r="http://schemas.openxmlformats.org/officeDocument/2006/relationships" xmlns:p="http://schemas.openxmlformats.org/presentationml/2006/main">
   <p:cSld>
+    <p:spTree>
+      <p:nvGrpSpPr>
+        <p:cNvPr id="1" name=""/>
+        <p:cNvGrpSpPr/>
+        <p:nvPr/>
+      </p:nvGrpSpPr>
+      <p:grpSpPr/>
+      <p:pic>
+        <p:nvPicPr>
+          <p:cNvPr id="2" name="Picture 1"/>
+          <p:cNvPicPr>
+            <a:picLocks noChangeAspect="1"/>
+          </p:cNvPicPr>
+          <p:nvPr/>
+        </p:nvPicPr>
+        <p:blipFill>
+          <a:blip r:embed="rId1"/>
+          <a:stretch>
+            <a:fillRect/>
+          </a:stretch>
+        </p:blipFill>
+        <p:spPr>
+          <a:xfrm>
+            <a:off x="0" y="738505"/>
+            <a:ext cx="9144000" cy="3665855"/>
+          </a:xfrm>
+          <a:prstGeom prst="rect">
+            <a:avLst/>
+          </a:prstGeom>
+        </p:spPr>
+      </p:pic>
+    </p:spTree>
+  </p:cSld>
+  <p:clrMapOvr>
+    <a:masterClrMapping/>
+  </p:clrMapOvr>
+</p:sld>
+</file>
+
+<file path=ppt/slides/slide11.xml><?xml version="1.0" encoding="utf-8"?>
+<p:sld xmlns:a="http://schemas.openxmlformats.org/drawingml/2006/main" xmlns:r="http://schemas.openxmlformats.org/officeDocument/2006/relationships" xmlns:p="http://schemas.openxmlformats.org/presentationml/2006/main">
+  <p:cSld>
     <p:bg>
       <p:bgPr>
         <a:solidFill>
@@ -4289,6 +4333,1655 @@
                 <a:ea typeface="Calibri" panose="020F0502020204030204" pitchFamily="34" charset="-122"/>
                 <a:cs typeface="Calibri" panose="020F0502020204030204" pitchFamily="34" charset="-120"/>
               </a:rPr>
+              <a:t>Interactive Visual Analytics — Folium Maps</a:t>
+            </a:r>
+            <a:endParaRPr lang="en-US" sz="2600" dirty="0"/>
+          </a:p>
+        </p:txBody>
+      </p:sp>
+      <p:sp>
+        <p:nvSpPr>
+          <p:cNvPr id="4" name="Text 2"/>
+          <p:cNvSpPr/>
+          <p:nvPr/>
+        </p:nvSpPr>
+        <p:spPr>
+          <a:xfrm>
+            <a:off x="548640" y="749808"/>
+            <a:ext cx="8229600" cy="292608"/>
+          </a:xfrm>
+          <a:prstGeom prst="rect">
+            <a:avLst/>
+          </a:prstGeom>
+          <a:noFill/>
+        </p:spPr>
+        <p:txBody>
+          <a:bodyPr wrap="square" lIns="0" tIns="0" rIns="0" bIns="0" rtlCol="0" anchor="ctr"/>
+          <a:lstStyle/>
+          <a:p>
+            <a:pPr marL="0" indent="0">
+              <a:buNone/>
+            </a:pPr>
+            <a:r>
+              <a:rPr lang="en-US" sz="1300" dirty="0">
+                <a:solidFill>
+                  <a:srgbClr val="546E7A"/>
+                </a:solidFill>
+                <a:latin typeface="Calibri" panose="020F0502020204030204" pitchFamily="34" charset="0"/>
+                <a:ea typeface="Calibri" panose="020F0502020204030204" pitchFamily="34" charset="-122"/>
+                <a:cs typeface="Calibri" panose="020F0502020204030204" pitchFamily="34" charset="-120"/>
+              </a:rPr>
+              <a:t>Launch site mapping &amp; proximity analysis · GitHub: https://github.com/codemewithc/Python-projects</a:t>
+            </a:r>
+            <a:endParaRPr lang="en-US" sz="1300" dirty="0"/>
+          </a:p>
+        </p:txBody>
+      </p:sp>
+      <p:sp>
+        <p:nvSpPr>
+          <p:cNvPr id="5" name="Shape 3"/>
+          <p:cNvSpPr/>
+          <p:nvPr/>
+        </p:nvSpPr>
+        <p:spPr>
+          <a:xfrm>
+            <a:off x="365760" y="1051560"/>
+            <a:ext cx="8412480" cy="22860"/>
+          </a:xfrm>
+          <a:prstGeom prst="rect">
+            <a:avLst/>
+          </a:prstGeom>
+          <a:solidFill>
+            <a:srgbClr val="00BCD4"/>
+          </a:solidFill>
+          <a:ln w="12700">
+            <a:solidFill>
+              <a:srgbClr val="00BCD4"/>
+            </a:solidFill>
+            <a:prstDash val="solid"/>
+          </a:ln>
+        </p:spPr>
+      </p:sp>
+      <p:sp>
+        <p:nvSpPr>
+          <p:cNvPr id="6" name="Text 4"/>
+          <p:cNvSpPr/>
+          <p:nvPr/>
+        </p:nvSpPr>
+        <p:spPr>
+          <a:xfrm>
+            <a:off x="365760" y="1188720"/>
+            <a:ext cx="4754880" cy="256032"/>
+          </a:xfrm>
+          <a:prstGeom prst="rect">
+            <a:avLst/>
+          </a:prstGeom>
+          <a:noFill/>
+        </p:spPr>
+        <p:txBody>
+          <a:bodyPr wrap="square" lIns="0" tIns="0" rIns="0" bIns="0" rtlCol="0" anchor="ctr"/>
+          <a:lstStyle/>
+          <a:p>
+            <a:pPr marL="0" indent="0">
+              <a:buNone/>
+            </a:pPr>
+            <a:r>
+              <a:rPr lang="en-US" sz="1300" b="1" dirty="0">
+                <a:solidFill>
+                  <a:srgbClr val="1565C0"/>
+                </a:solidFill>
+                <a:latin typeface="Calibri" panose="020F0502020204030204" pitchFamily="34" charset="0"/>
+                <a:ea typeface="Calibri" panose="020F0502020204030204" pitchFamily="34" charset="-122"/>
+                <a:cs typeface="Calibri" panose="020F0502020204030204" pitchFamily="34" charset="-120"/>
+              </a:rPr>
+              <a:t>Launch Sites Mapped</a:t>
+            </a:r>
+            <a:endParaRPr lang="en-US" sz="1300" dirty="0"/>
+          </a:p>
+        </p:txBody>
+      </p:sp>
+      <p:graphicFrame>
+        <p:nvGraphicFramePr>
+          <p:cNvPr id="10" name="Table 0"/>
+          <p:cNvGraphicFramePr>
+            <a:graphicFrameLocks noGrp="1"/>
+          </p:cNvGraphicFramePr>
+          <p:nvPr/>
+        </p:nvGraphicFramePr>
+        <p:xfrm>
+          <a:off x="365760" y="1481328"/>
+          <a:ext cx="4754880" cy="1508760"/>
+        </p:xfrm>
+        <a:graphic>
+          <a:graphicData uri="http://schemas.openxmlformats.org/drawingml/2006/table">
+            <a:tbl>
+              <a:tblPr/>
+              <a:tblGrid>
+                <a:gridCol w="1463040"/>
+                <a:gridCol w="1188720"/>
+                <a:gridCol w="1005840"/>
+                <a:gridCol w="1097280"/>
+              </a:tblGrid>
+              <a:tr h="301752">
+                <a:tc>
+                  <a:txBody>
+                    <a:bodyPr/>
+                    <a:lstStyle/>
+                    <a:p>
+                      <a:pPr marL="0" indent="0">
+                        <a:buNone/>
+                      </a:pPr>
+                      <a:r>
+                        <a:rPr lang="en-US" sz="1000" b="1" dirty="0">
+                          <a:solidFill>
+                            <a:srgbClr val="FFFFFF"/>
+                          </a:solidFill>
+                          <a:latin typeface="Calibri" panose="020F0502020204030204" pitchFamily="34" charset="0"/>
+                          <a:ea typeface="Calibri" panose="020F0502020204030204" pitchFamily="34" charset="-122"/>
+                          <a:cs typeface="Calibri" panose="020F0502020204030204" pitchFamily="34" charset="-120"/>
+                        </a:rPr>
+                        <a:t>Site</a:t>
+                      </a:r>
+                      <a:endParaRPr lang="en-US" sz="1000" dirty="0">
+                        <a:latin typeface="Calibri" panose="020F0502020204030204" pitchFamily="34" charset="0"/>
+                        <a:ea typeface="Calibri" panose="020F0502020204030204" pitchFamily="34" charset="0"/>
+                        <a:cs typeface="Calibri" panose="020F0502020204030204" pitchFamily="34" charset="0"/>
+                      </a:endParaRPr>
+                    </a:p>
+                  </a:txBody>
+                  <a:tcPr>
+                    <a:lnL w="0" cap="flat" cmpd="sng" algn="ctr">
+                      <a:noFill/>
+                    </a:lnL>
+                    <a:lnR w="0" cap="flat" cmpd="sng" algn="ctr">
+                      <a:noFill/>
+                    </a:lnR>
+                    <a:lnT w="0" cap="flat" cmpd="sng" algn="ctr">
+                      <a:noFill/>
+                    </a:lnT>
+                    <a:lnB w="0" cap="flat" cmpd="sng" algn="ctr">
+                      <a:noFill/>
+                    </a:lnB>
+                    <a:solidFill>
+                      <a:srgbClr val="1565C0"/>
+                    </a:solidFill>
+                  </a:tcPr>
+                </a:tc>
+                <a:tc>
+                  <a:txBody>
+                    <a:bodyPr/>
+                    <a:lstStyle/>
+                    <a:p>
+                      <a:pPr marL="0" indent="0">
+                        <a:buNone/>
+                      </a:pPr>
+                      <a:r>
+                        <a:rPr lang="en-US" sz="1000" b="1" dirty="0">
+                          <a:solidFill>
+                            <a:srgbClr val="FFFFFF"/>
+                          </a:solidFill>
+                          <a:latin typeface="Calibri" panose="020F0502020204030204" pitchFamily="34" charset="0"/>
+                          <a:ea typeface="Calibri" panose="020F0502020204030204" pitchFamily="34" charset="-122"/>
+                          <a:cs typeface="Calibri" panose="020F0502020204030204" pitchFamily="34" charset="-120"/>
+                        </a:rPr>
+                        <a:t>State</a:t>
+                      </a:r>
+                      <a:endParaRPr lang="en-US" sz="1000" dirty="0">
+                        <a:latin typeface="Calibri" panose="020F0502020204030204" pitchFamily="34" charset="0"/>
+                        <a:ea typeface="Calibri" panose="020F0502020204030204" pitchFamily="34" charset="0"/>
+                        <a:cs typeface="Calibri" panose="020F0502020204030204" pitchFamily="34" charset="0"/>
+                      </a:endParaRPr>
+                    </a:p>
+                  </a:txBody>
+                  <a:tcPr>
+                    <a:lnL w="0" cap="flat" cmpd="sng" algn="ctr">
+                      <a:noFill/>
+                    </a:lnL>
+                    <a:lnR w="0" cap="flat" cmpd="sng" algn="ctr">
+                      <a:noFill/>
+                    </a:lnR>
+                    <a:lnT w="0" cap="flat" cmpd="sng" algn="ctr">
+                      <a:noFill/>
+                    </a:lnT>
+                    <a:lnB w="0" cap="flat" cmpd="sng" algn="ctr">
+                      <a:noFill/>
+                    </a:lnB>
+                    <a:solidFill>
+                      <a:srgbClr val="1565C0"/>
+                    </a:solidFill>
+                  </a:tcPr>
+                </a:tc>
+                <a:tc>
+                  <a:txBody>
+                    <a:bodyPr/>
+                    <a:lstStyle/>
+                    <a:p>
+                      <a:pPr marL="0" indent="0">
+                        <a:buNone/>
+                      </a:pPr>
+                      <a:r>
+                        <a:rPr lang="en-US" sz="1000" b="1" dirty="0">
+                          <a:solidFill>
+                            <a:srgbClr val="FFFFFF"/>
+                          </a:solidFill>
+                          <a:latin typeface="Calibri" panose="020F0502020204030204" pitchFamily="34" charset="0"/>
+                          <a:ea typeface="Calibri" panose="020F0502020204030204" pitchFamily="34" charset="-122"/>
+                          <a:cs typeface="Calibri" panose="020F0502020204030204" pitchFamily="34" charset="-120"/>
+                        </a:rPr>
+                        <a:t>Launches</a:t>
+                      </a:r>
+                      <a:endParaRPr lang="en-US" sz="1000" dirty="0">
+                        <a:latin typeface="Calibri" panose="020F0502020204030204" pitchFamily="34" charset="0"/>
+                        <a:ea typeface="Calibri" panose="020F0502020204030204" pitchFamily="34" charset="0"/>
+                        <a:cs typeface="Calibri" panose="020F0502020204030204" pitchFamily="34" charset="0"/>
+                      </a:endParaRPr>
+                    </a:p>
+                  </a:txBody>
+                  <a:tcPr>
+                    <a:lnL w="0" cap="flat" cmpd="sng" algn="ctr">
+                      <a:noFill/>
+                    </a:lnL>
+                    <a:lnR w="0" cap="flat" cmpd="sng" algn="ctr">
+                      <a:noFill/>
+                    </a:lnR>
+                    <a:lnT w="0" cap="flat" cmpd="sng" algn="ctr">
+                      <a:noFill/>
+                    </a:lnT>
+                    <a:lnB w="0" cap="flat" cmpd="sng" algn="ctr">
+                      <a:noFill/>
+                    </a:lnB>
+                    <a:solidFill>
+                      <a:srgbClr val="1565C0"/>
+                    </a:solidFill>
+                  </a:tcPr>
+                </a:tc>
+                <a:tc>
+                  <a:txBody>
+                    <a:bodyPr/>
+                    <a:lstStyle/>
+                    <a:p>
+                      <a:pPr marL="0" indent="0">
+                        <a:buNone/>
+                      </a:pPr>
+                      <a:r>
+                        <a:rPr lang="en-US" sz="1000" b="1" dirty="0">
+                          <a:solidFill>
+                            <a:srgbClr val="FFFFFF"/>
+                          </a:solidFill>
+                          <a:latin typeface="Calibri" panose="020F0502020204030204" pitchFamily="34" charset="0"/>
+                          <a:ea typeface="Calibri" panose="020F0502020204030204" pitchFamily="34" charset="-122"/>
+                          <a:cs typeface="Calibri" panose="020F0502020204030204" pitchFamily="34" charset="-120"/>
+                        </a:rPr>
+                        <a:t>Success%</a:t>
+                      </a:r>
+                      <a:endParaRPr lang="en-US" sz="1000" dirty="0">
+                        <a:latin typeface="Calibri" panose="020F0502020204030204" pitchFamily="34" charset="0"/>
+                        <a:ea typeface="Calibri" panose="020F0502020204030204" pitchFamily="34" charset="0"/>
+                        <a:cs typeface="Calibri" panose="020F0502020204030204" pitchFamily="34" charset="0"/>
+                      </a:endParaRPr>
+                    </a:p>
+                  </a:txBody>
+                  <a:tcPr>
+                    <a:lnL w="0" cap="flat" cmpd="sng" algn="ctr">
+                      <a:noFill/>
+                    </a:lnL>
+                    <a:lnR w="0" cap="flat" cmpd="sng" algn="ctr">
+                      <a:noFill/>
+                    </a:lnR>
+                    <a:lnT w="0" cap="flat" cmpd="sng" algn="ctr">
+                      <a:noFill/>
+                    </a:lnT>
+                    <a:lnB w="0" cap="flat" cmpd="sng" algn="ctr">
+                      <a:noFill/>
+                    </a:lnB>
+                    <a:solidFill>
+                      <a:srgbClr val="1565C0"/>
+                    </a:solidFill>
+                  </a:tcPr>
+                </a:tc>
+              </a:tr>
+              <a:tr h="301752">
+                <a:tc>
+                  <a:txBody>
+                    <a:bodyPr/>
+                    <a:lstStyle/>
+                    <a:p>
+                      <a:pPr marL="0" indent="0">
+                        <a:buNone/>
+                      </a:pPr>
+                      <a:r>
+                        <a:rPr lang="en-US" sz="1000" dirty="0">
+                          <a:solidFill>
+                            <a:srgbClr val="1A237E"/>
+                          </a:solidFill>
+                          <a:latin typeface="Calibri" panose="020F0502020204030204" pitchFamily="34" charset="0"/>
+                          <a:ea typeface="Calibri" panose="020F0502020204030204" pitchFamily="34" charset="-122"/>
+                          <a:cs typeface="Calibri" panose="020F0502020204030204" pitchFamily="34" charset="-120"/>
+                        </a:rPr>
+                        <a:t>KSC LC-39A</a:t>
+                      </a:r>
+                      <a:endParaRPr lang="en-US" sz="1000" dirty="0">
+                        <a:latin typeface="Calibri" panose="020F0502020204030204" pitchFamily="34" charset="0"/>
+                        <a:ea typeface="Calibri" panose="020F0502020204030204" pitchFamily="34" charset="0"/>
+                        <a:cs typeface="Calibri" panose="020F0502020204030204" pitchFamily="34" charset="0"/>
+                      </a:endParaRPr>
+                    </a:p>
+                  </a:txBody>
+                  <a:tcPr>
+                    <a:lnL w="0" cap="flat" cmpd="sng" algn="ctr">
+                      <a:noFill/>
+                    </a:lnL>
+                    <a:lnR w="0" cap="flat" cmpd="sng" algn="ctr">
+                      <a:noFill/>
+                    </a:lnR>
+                    <a:lnT w="0" cap="flat" cmpd="sng" algn="ctr">
+                      <a:noFill/>
+                    </a:lnT>
+                    <a:lnB w="0" cap="flat" cmpd="sng" algn="ctr">
+                      <a:noFill/>
+                    </a:lnB>
+                    <a:solidFill>
+                      <a:srgbClr val="FFFFFF"/>
+                    </a:solidFill>
+                  </a:tcPr>
+                </a:tc>
+                <a:tc>
+                  <a:txBody>
+                    <a:bodyPr/>
+                    <a:lstStyle/>
+                    <a:p>
+                      <a:pPr marL="0" indent="0">
+                        <a:buNone/>
+                      </a:pPr>
+                      <a:r>
+                        <a:rPr lang="en-US" sz="1000" dirty="0">
+                          <a:solidFill>
+                            <a:srgbClr val="1A237E"/>
+                          </a:solidFill>
+                          <a:latin typeface="Calibri" panose="020F0502020204030204" pitchFamily="34" charset="0"/>
+                          <a:ea typeface="Calibri" panose="020F0502020204030204" pitchFamily="34" charset="-122"/>
+                          <a:cs typeface="Calibri" panose="020F0502020204030204" pitchFamily="34" charset="-120"/>
+                        </a:rPr>
+                        <a:t>Florida</a:t>
+                      </a:r>
+                      <a:endParaRPr lang="en-US" sz="1000" dirty="0">
+                        <a:latin typeface="Calibri" panose="020F0502020204030204" pitchFamily="34" charset="0"/>
+                        <a:ea typeface="Calibri" panose="020F0502020204030204" pitchFamily="34" charset="0"/>
+                        <a:cs typeface="Calibri" panose="020F0502020204030204" pitchFamily="34" charset="0"/>
+                      </a:endParaRPr>
+                    </a:p>
+                  </a:txBody>
+                  <a:tcPr>
+                    <a:lnL w="0" cap="flat" cmpd="sng" algn="ctr">
+                      <a:noFill/>
+                    </a:lnL>
+                    <a:lnR w="0" cap="flat" cmpd="sng" algn="ctr">
+                      <a:noFill/>
+                    </a:lnR>
+                    <a:lnT w="0" cap="flat" cmpd="sng" algn="ctr">
+                      <a:noFill/>
+                    </a:lnT>
+                    <a:lnB w="0" cap="flat" cmpd="sng" algn="ctr">
+                      <a:noFill/>
+                    </a:lnB>
+                    <a:solidFill>
+                      <a:srgbClr val="FFFFFF"/>
+                    </a:solidFill>
+                  </a:tcPr>
+                </a:tc>
+                <a:tc>
+                  <a:txBody>
+                    <a:bodyPr/>
+                    <a:lstStyle/>
+                    <a:p>
+                      <a:pPr marL="0" indent="0">
+                        <a:buNone/>
+                      </a:pPr>
+                      <a:r>
+                        <a:rPr lang="en-US" sz="1000" dirty="0">
+                          <a:solidFill>
+                            <a:srgbClr val="1A237E"/>
+                          </a:solidFill>
+                          <a:latin typeface="Calibri" panose="020F0502020204030204" pitchFamily="34" charset="0"/>
+                          <a:ea typeface="Calibri" panose="020F0502020204030204" pitchFamily="34" charset="-122"/>
+                          <a:cs typeface="Calibri" panose="020F0502020204030204" pitchFamily="34" charset="-120"/>
+                        </a:rPr>
+                        <a:t>27</a:t>
+                      </a:r>
+                      <a:endParaRPr lang="en-US" sz="1000" dirty="0">
+                        <a:latin typeface="Calibri" panose="020F0502020204030204" pitchFamily="34" charset="0"/>
+                        <a:ea typeface="Calibri" panose="020F0502020204030204" pitchFamily="34" charset="0"/>
+                        <a:cs typeface="Calibri" panose="020F0502020204030204" pitchFamily="34" charset="0"/>
+                      </a:endParaRPr>
+                    </a:p>
+                  </a:txBody>
+                  <a:tcPr>
+                    <a:lnL w="0" cap="flat" cmpd="sng" algn="ctr">
+                      <a:noFill/>
+                    </a:lnL>
+                    <a:lnR w="0" cap="flat" cmpd="sng" algn="ctr">
+                      <a:noFill/>
+                    </a:lnR>
+                    <a:lnT w="0" cap="flat" cmpd="sng" algn="ctr">
+                      <a:noFill/>
+                    </a:lnT>
+                    <a:lnB w="0" cap="flat" cmpd="sng" algn="ctr">
+                      <a:noFill/>
+                    </a:lnB>
+                    <a:solidFill>
+                      <a:srgbClr val="FFFFFF"/>
+                    </a:solidFill>
+                  </a:tcPr>
+                </a:tc>
+                <a:tc>
+                  <a:txBody>
+                    <a:bodyPr/>
+                    <a:lstStyle/>
+                    <a:p>
+                      <a:pPr marL="0" indent="0">
+                        <a:buNone/>
+                      </a:pPr>
+                      <a:r>
+                        <a:rPr lang="en-US" sz="1000" dirty="0">
+                          <a:solidFill>
+                            <a:srgbClr val="1A237E"/>
+                          </a:solidFill>
+                          <a:latin typeface="Calibri" panose="020F0502020204030204" pitchFamily="34" charset="0"/>
+                          <a:ea typeface="Calibri" panose="020F0502020204030204" pitchFamily="34" charset="-122"/>
+                          <a:cs typeface="Calibri" panose="020F0502020204030204" pitchFamily="34" charset="-120"/>
+                        </a:rPr>
+                        <a:t>77%</a:t>
+                      </a:r>
+                      <a:endParaRPr lang="en-US" sz="1000" dirty="0">
+                        <a:latin typeface="Calibri" panose="020F0502020204030204" pitchFamily="34" charset="0"/>
+                        <a:ea typeface="Calibri" panose="020F0502020204030204" pitchFamily="34" charset="0"/>
+                        <a:cs typeface="Calibri" panose="020F0502020204030204" pitchFamily="34" charset="0"/>
+                      </a:endParaRPr>
+                    </a:p>
+                  </a:txBody>
+                  <a:tcPr>
+                    <a:lnL w="0" cap="flat" cmpd="sng" algn="ctr">
+                      <a:noFill/>
+                    </a:lnL>
+                    <a:lnR w="0" cap="flat" cmpd="sng" algn="ctr">
+                      <a:noFill/>
+                    </a:lnR>
+                    <a:lnT w="0" cap="flat" cmpd="sng" algn="ctr">
+                      <a:noFill/>
+                    </a:lnT>
+                    <a:lnB w="0" cap="flat" cmpd="sng" algn="ctr">
+                      <a:noFill/>
+                    </a:lnB>
+                    <a:solidFill>
+                      <a:srgbClr val="FFFFFF"/>
+                    </a:solidFill>
+                  </a:tcPr>
+                </a:tc>
+              </a:tr>
+              <a:tr h="301752">
+                <a:tc>
+                  <a:txBody>
+                    <a:bodyPr/>
+                    <a:lstStyle/>
+                    <a:p>
+                      <a:pPr marL="0" indent="0">
+                        <a:buNone/>
+                      </a:pPr>
+                      <a:r>
+                        <a:rPr lang="en-US" sz="1000" dirty="0">
+                          <a:solidFill>
+                            <a:srgbClr val="1A237E"/>
+                          </a:solidFill>
+                          <a:latin typeface="Calibri" panose="020F0502020204030204" pitchFamily="34" charset="0"/>
+                          <a:ea typeface="Calibri" panose="020F0502020204030204" pitchFamily="34" charset="-122"/>
+                          <a:cs typeface="Calibri" panose="020F0502020204030204" pitchFamily="34" charset="-120"/>
+                        </a:rPr>
+                        <a:t>CCAFS LC-40</a:t>
+                      </a:r>
+                      <a:endParaRPr lang="en-US" sz="1000" dirty="0">
+                        <a:latin typeface="Calibri" panose="020F0502020204030204" pitchFamily="34" charset="0"/>
+                        <a:ea typeface="Calibri" panose="020F0502020204030204" pitchFamily="34" charset="0"/>
+                        <a:cs typeface="Calibri" panose="020F0502020204030204" pitchFamily="34" charset="0"/>
+                      </a:endParaRPr>
+                    </a:p>
+                  </a:txBody>
+                  <a:tcPr>
+                    <a:lnL w="0" cap="flat" cmpd="sng" algn="ctr">
+                      <a:noFill/>
+                    </a:lnL>
+                    <a:lnR w="0" cap="flat" cmpd="sng" algn="ctr">
+                      <a:noFill/>
+                    </a:lnR>
+                    <a:lnT w="0" cap="flat" cmpd="sng" algn="ctr">
+                      <a:noFill/>
+                    </a:lnT>
+                    <a:lnB w="0" cap="flat" cmpd="sng" algn="ctr">
+                      <a:noFill/>
+                    </a:lnB>
+                    <a:solidFill>
+                      <a:srgbClr val="F5F5F5"/>
+                    </a:solidFill>
+                  </a:tcPr>
+                </a:tc>
+                <a:tc>
+                  <a:txBody>
+                    <a:bodyPr/>
+                    <a:lstStyle/>
+                    <a:p>
+                      <a:pPr marL="0" indent="0">
+                        <a:buNone/>
+                      </a:pPr>
+                      <a:r>
+                        <a:rPr lang="en-US" sz="1000" dirty="0">
+                          <a:solidFill>
+                            <a:srgbClr val="1A237E"/>
+                          </a:solidFill>
+                          <a:latin typeface="Calibri" panose="020F0502020204030204" pitchFamily="34" charset="0"/>
+                          <a:ea typeface="Calibri" panose="020F0502020204030204" pitchFamily="34" charset="-122"/>
+                          <a:cs typeface="Calibri" panose="020F0502020204030204" pitchFamily="34" charset="-120"/>
+                        </a:rPr>
+                        <a:t>Florida</a:t>
+                      </a:r>
+                      <a:endParaRPr lang="en-US" sz="1000" dirty="0">
+                        <a:latin typeface="Calibri" panose="020F0502020204030204" pitchFamily="34" charset="0"/>
+                        <a:ea typeface="Calibri" panose="020F0502020204030204" pitchFamily="34" charset="0"/>
+                        <a:cs typeface="Calibri" panose="020F0502020204030204" pitchFamily="34" charset="0"/>
+                      </a:endParaRPr>
+                    </a:p>
+                  </a:txBody>
+                  <a:tcPr>
+                    <a:lnL w="0" cap="flat" cmpd="sng" algn="ctr">
+                      <a:noFill/>
+                    </a:lnL>
+                    <a:lnR w="0" cap="flat" cmpd="sng" algn="ctr">
+                      <a:noFill/>
+                    </a:lnR>
+                    <a:lnT w="0" cap="flat" cmpd="sng" algn="ctr">
+                      <a:noFill/>
+                    </a:lnT>
+                    <a:lnB w="0" cap="flat" cmpd="sng" algn="ctr">
+                      <a:noFill/>
+                    </a:lnB>
+                    <a:solidFill>
+                      <a:srgbClr val="F5F5F5"/>
+                    </a:solidFill>
+                  </a:tcPr>
+                </a:tc>
+                <a:tc>
+                  <a:txBody>
+                    <a:bodyPr/>
+                    <a:lstStyle/>
+                    <a:p>
+                      <a:pPr marL="0" indent="0">
+                        <a:buNone/>
+                      </a:pPr>
+                      <a:r>
+                        <a:rPr lang="en-US" sz="1000" dirty="0">
+                          <a:solidFill>
+                            <a:srgbClr val="1A237E"/>
+                          </a:solidFill>
+                          <a:latin typeface="Calibri" panose="020F0502020204030204" pitchFamily="34" charset="0"/>
+                          <a:ea typeface="Calibri" panose="020F0502020204030204" pitchFamily="34" charset="-122"/>
+                          <a:cs typeface="Calibri" panose="020F0502020204030204" pitchFamily="34" charset="-120"/>
+                        </a:rPr>
+                        <a:t>26</a:t>
+                      </a:r>
+                      <a:endParaRPr lang="en-US" sz="1000" dirty="0">
+                        <a:latin typeface="Calibri" panose="020F0502020204030204" pitchFamily="34" charset="0"/>
+                        <a:ea typeface="Calibri" panose="020F0502020204030204" pitchFamily="34" charset="0"/>
+                        <a:cs typeface="Calibri" panose="020F0502020204030204" pitchFamily="34" charset="0"/>
+                      </a:endParaRPr>
+                    </a:p>
+                  </a:txBody>
+                  <a:tcPr>
+                    <a:lnL w="0" cap="flat" cmpd="sng" algn="ctr">
+                      <a:noFill/>
+                    </a:lnL>
+                    <a:lnR w="0" cap="flat" cmpd="sng" algn="ctr">
+                      <a:noFill/>
+                    </a:lnR>
+                    <a:lnT w="0" cap="flat" cmpd="sng" algn="ctr">
+                      <a:noFill/>
+                    </a:lnT>
+                    <a:lnB w="0" cap="flat" cmpd="sng" algn="ctr">
+                      <a:noFill/>
+                    </a:lnB>
+                    <a:solidFill>
+                      <a:srgbClr val="F5F5F5"/>
+                    </a:solidFill>
+                  </a:tcPr>
+                </a:tc>
+                <a:tc>
+                  <a:txBody>
+                    <a:bodyPr/>
+                    <a:lstStyle/>
+                    <a:p>
+                      <a:pPr marL="0" indent="0">
+                        <a:buNone/>
+                      </a:pPr>
+                      <a:r>
+                        <a:rPr lang="en-US" sz="1000" dirty="0">
+                          <a:solidFill>
+                            <a:srgbClr val="1A237E"/>
+                          </a:solidFill>
+                          <a:latin typeface="Calibri" panose="020F0502020204030204" pitchFamily="34" charset="0"/>
+                          <a:ea typeface="Calibri" panose="020F0502020204030204" pitchFamily="34" charset="-122"/>
+                          <a:cs typeface="Calibri" panose="020F0502020204030204" pitchFamily="34" charset="-120"/>
+                        </a:rPr>
+                        <a:t>65%</a:t>
+                      </a:r>
+                      <a:endParaRPr lang="en-US" sz="1000" dirty="0">
+                        <a:latin typeface="Calibri" panose="020F0502020204030204" pitchFamily="34" charset="0"/>
+                        <a:ea typeface="Calibri" panose="020F0502020204030204" pitchFamily="34" charset="0"/>
+                        <a:cs typeface="Calibri" panose="020F0502020204030204" pitchFamily="34" charset="0"/>
+                      </a:endParaRPr>
+                    </a:p>
+                  </a:txBody>
+                  <a:tcPr>
+                    <a:lnL w="0" cap="flat" cmpd="sng" algn="ctr">
+                      <a:noFill/>
+                    </a:lnL>
+                    <a:lnR w="0" cap="flat" cmpd="sng" algn="ctr">
+                      <a:noFill/>
+                    </a:lnR>
+                    <a:lnT w="0" cap="flat" cmpd="sng" algn="ctr">
+                      <a:noFill/>
+                    </a:lnT>
+                    <a:lnB w="0" cap="flat" cmpd="sng" algn="ctr">
+                      <a:noFill/>
+                    </a:lnB>
+                    <a:solidFill>
+                      <a:srgbClr val="F5F5F5"/>
+                    </a:solidFill>
+                  </a:tcPr>
+                </a:tc>
+              </a:tr>
+              <a:tr h="301752">
+                <a:tc>
+                  <a:txBody>
+                    <a:bodyPr/>
+                    <a:lstStyle/>
+                    <a:p>
+                      <a:pPr marL="0" indent="0">
+                        <a:buNone/>
+                      </a:pPr>
+                      <a:r>
+                        <a:rPr lang="en-US" sz="1000" dirty="0">
+                          <a:solidFill>
+                            <a:srgbClr val="1A237E"/>
+                          </a:solidFill>
+                          <a:latin typeface="Calibri" panose="020F0502020204030204" pitchFamily="34" charset="0"/>
+                          <a:ea typeface="Calibri" panose="020F0502020204030204" pitchFamily="34" charset="-122"/>
+                          <a:cs typeface="Calibri" panose="020F0502020204030204" pitchFamily="34" charset="-120"/>
+                        </a:rPr>
+                        <a:t>CCAFS SLC-40</a:t>
+                      </a:r>
+                      <a:endParaRPr lang="en-US" sz="1000" dirty="0">
+                        <a:latin typeface="Calibri" panose="020F0502020204030204" pitchFamily="34" charset="0"/>
+                        <a:ea typeface="Calibri" panose="020F0502020204030204" pitchFamily="34" charset="0"/>
+                        <a:cs typeface="Calibri" panose="020F0502020204030204" pitchFamily="34" charset="0"/>
+                      </a:endParaRPr>
+                    </a:p>
+                  </a:txBody>
+                  <a:tcPr>
+                    <a:lnL w="0" cap="flat" cmpd="sng" algn="ctr">
+                      <a:noFill/>
+                    </a:lnL>
+                    <a:lnR w="0" cap="flat" cmpd="sng" algn="ctr">
+                      <a:noFill/>
+                    </a:lnR>
+                    <a:lnT w="0" cap="flat" cmpd="sng" algn="ctr">
+                      <a:noFill/>
+                    </a:lnT>
+                    <a:lnB w="0" cap="flat" cmpd="sng" algn="ctr">
+                      <a:noFill/>
+                    </a:lnB>
+                    <a:solidFill>
+                      <a:srgbClr val="FFFFFF"/>
+                    </a:solidFill>
+                  </a:tcPr>
+                </a:tc>
+                <a:tc>
+                  <a:txBody>
+                    <a:bodyPr/>
+                    <a:lstStyle/>
+                    <a:p>
+                      <a:pPr marL="0" indent="0">
+                        <a:buNone/>
+                      </a:pPr>
+                      <a:r>
+                        <a:rPr lang="en-US" sz="1000" dirty="0">
+                          <a:solidFill>
+                            <a:srgbClr val="1A237E"/>
+                          </a:solidFill>
+                          <a:latin typeface="Calibri" panose="020F0502020204030204" pitchFamily="34" charset="0"/>
+                          <a:ea typeface="Calibri" panose="020F0502020204030204" pitchFamily="34" charset="-122"/>
+                          <a:cs typeface="Calibri" panose="020F0502020204030204" pitchFamily="34" charset="-120"/>
+                        </a:rPr>
+                        <a:t>Florida</a:t>
+                      </a:r>
+                      <a:endParaRPr lang="en-US" sz="1000" dirty="0">
+                        <a:latin typeface="Calibri" panose="020F0502020204030204" pitchFamily="34" charset="0"/>
+                        <a:ea typeface="Calibri" panose="020F0502020204030204" pitchFamily="34" charset="0"/>
+                        <a:cs typeface="Calibri" panose="020F0502020204030204" pitchFamily="34" charset="0"/>
+                      </a:endParaRPr>
+                    </a:p>
+                  </a:txBody>
+                  <a:tcPr>
+                    <a:lnL w="0" cap="flat" cmpd="sng" algn="ctr">
+                      <a:noFill/>
+                    </a:lnL>
+                    <a:lnR w="0" cap="flat" cmpd="sng" algn="ctr">
+                      <a:noFill/>
+                    </a:lnR>
+                    <a:lnT w="0" cap="flat" cmpd="sng" algn="ctr">
+                      <a:noFill/>
+                    </a:lnT>
+                    <a:lnB w="0" cap="flat" cmpd="sng" algn="ctr">
+                      <a:noFill/>
+                    </a:lnB>
+                    <a:solidFill>
+                      <a:srgbClr val="FFFFFF"/>
+                    </a:solidFill>
+                  </a:tcPr>
+                </a:tc>
+                <a:tc>
+                  <a:txBody>
+                    <a:bodyPr/>
+                    <a:lstStyle/>
+                    <a:p>
+                      <a:pPr marL="0" indent="0">
+                        <a:buNone/>
+                      </a:pPr>
+                      <a:r>
+                        <a:rPr lang="en-US" sz="1000" dirty="0">
+                          <a:solidFill>
+                            <a:srgbClr val="1A237E"/>
+                          </a:solidFill>
+                          <a:latin typeface="Calibri" panose="020F0502020204030204" pitchFamily="34" charset="0"/>
+                          <a:ea typeface="Calibri" panose="020F0502020204030204" pitchFamily="34" charset="-122"/>
+                          <a:cs typeface="Calibri" panose="020F0502020204030204" pitchFamily="34" charset="-120"/>
+                        </a:rPr>
+                        <a:t>22</a:t>
+                      </a:r>
+                      <a:endParaRPr lang="en-US" sz="1000" dirty="0">
+                        <a:latin typeface="Calibri" panose="020F0502020204030204" pitchFamily="34" charset="0"/>
+                        <a:ea typeface="Calibri" panose="020F0502020204030204" pitchFamily="34" charset="0"/>
+                        <a:cs typeface="Calibri" panose="020F0502020204030204" pitchFamily="34" charset="0"/>
+                      </a:endParaRPr>
+                    </a:p>
+                  </a:txBody>
+                  <a:tcPr>
+                    <a:lnL w="0" cap="flat" cmpd="sng" algn="ctr">
+                      <a:noFill/>
+                    </a:lnL>
+                    <a:lnR w="0" cap="flat" cmpd="sng" algn="ctr">
+                      <a:noFill/>
+                    </a:lnR>
+                    <a:lnT w="0" cap="flat" cmpd="sng" algn="ctr">
+                      <a:noFill/>
+                    </a:lnT>
+                    <a:lnB w="0" cap="flat" cmpd="sng" algn="ctr">
+                      <a:noFill/>
+                    </a:lnB>
+                    <a:solidFill>
+                      <a:srgbClr val="FFFFFF"/>
+                    </a:solidFill>
+                  </a:tcPr>
+                </a:tc>
+                <a:tc>
+                  <a:txBody>
+                    <a:bodyPr/>
+                    <a:lstStyle/>
+                    <a:p>
+                      <a:pPr marL="0" indent="0">
+                        <a:buNone/>
+                      </a:pPr>
+                      <a:r>
+                        <a:rPr lang="en-US" sz="1000" dirty="0">
+                          <a:solidFill>
+                            <a:srgbClr val="1A237E"/>
+                          </a:solidFill>
+                          <a:latin typeface="Calibri" panose="020F0502020204030204" pitchFamily="34" charset="0"/>
+                          <a:ea typeface="Calibri" panose="020F0502020204030204" pitchFamily="34" charset="-122"/>
+                          <a:cs typeface="Calibri" panose="020F0502020204030204" pitchFamily="34" charset="-120"/>
+                        </a:rPr>
+                        <a:t>59%</a:t>
+                      </a:r>
+                      <a:endParaRPr lang="en-US" sz="1000" dirty="0">
+                        <a:latin typeface="Calibri" panose="020F0502020204030204" pitchFamily="34" charset="0"/>
+                        <a:ea typeface="Calibri" panose="020F0502020204030204" pitchFamily="34" charset="0"/>
+                        <a:cs typeface="Calibri" panose="020F0502020204030204" pitchFamily="34" charset="0"/>
+                      </a:endParaRPr>
+                    </a:p>
+                  </a:txBody>
+                  <a:tcPr>
+                    <a:lnL w="0" cap="flat" cmpd="sng" algn="ctr">
+                      <a:noFill/>
+                    </a:lnL>
+                    <a:lnR w="0" cap="flat" cmpd="sng" algn="ctr">
+                      <a:noFill/>
+                    </a:lnR>
+                    <a:lnT w="0" cap="flat" cmpd="sng" algn="ctr">
+                      <a:noFill/>
+                    </a:lnT>
+                    <a:lnB w="0" cap="flat" cmpd="sng" algn="ctr">
+                      <a:noFill/>
+                    </a:lnB>
+                    <a:solidFill>
+                      <a:srgbClr val="FFFFFF"/>
+                    </a:solidFill>
+                  </a:tcPr>
+                </a:tc>
+              </a:tr>
+              <a:tr h="301752">
+                <a:tc>
+                  <a:txBody>
+                    <a:bodyPr/>
+                    <a:lstStyle/>
+                    <a:p>
+                      <a:pPr marL="0" indent="0">
+                        <a:buNone/>
+                      </a:pPr>
+                      <a:r>
+                        <a:rPr lang="en-US" sz="1000" dirty="0">
+                          <a:solidFill>
+                            <a:srgbClr val="1A237E"/>
+                          </a:solidFill>
+                          <a:latin typeface="Calibri" panose="020F0502020204030204" pitchFamily="34" charset="0"/>
+                          <a:ea typeface="Calibri" panose="020F0502020204030204" pitchFamily="34" charset="-122"/>
+                          <a:cs typeface="Calibri" panose="020F0502020204030204" pitchFamily="34" charset="-120"/>
+                        </a:rPr>
+                        <a:t>VAFB SLC-4E</a:t>
+                      </a:r>
+                      <a:endParaRPr lang="en-US" sz="1000" dirty="0">
+                        <a:latin typeface="Calibri" panose="020F0502020204030204" pitchFamily="34" charset="0"/>
+                        <a:ea typeface="Calibri" panose="020F0502020204030204" pitchFamily="34" charset="0"/>
+                        <a:cs typeface="Calibri" panose="020F0502020204030204" pitchFamily="34" charset="0"/>
+                      </a:endParaRPr>
+                    </a:p>
+                  </a:txBody>
+                  <a:tcPr>
+                    <a:lnL w="0" cap="flat" cmpd="sng" algn="ctr">
+                      <a:noFill/>
+                    </a:lnL>
+                    <a:lnR w="0" cap="flat" cmpd="sng" algn="ctr">
+                      <a:noFill/>
+                    </a:lnR>
+                    <a:lnT w="0" cap="flat" cmpd="sng" algn="ctr">
+                      <a:noFill/>
+                    </a:lnT>
+                    <a:lnB w="0" cap="flat" cmpd="sng" algn="ctr">
+                      <a:noFill/>
+                    </a:lnB>
+                    <a:solidFill>
+                      <a:srgbClr val="F5F5F5"/>
+                    </a:solidFill>
+                  </a:tcPr>
+                </a:tc>
+                <a:tc>
+                  <a:txBody>
+                    <a:bodyPr/>
+                    <a:lstStyle/>
+                    <a:p>
+                      <a:pPr marL="0" indent="0">
+                        <a:buNone/>
+                      </a:pPr>
+                      <a:r>
+                        <a:rPr lang="en-US" sz="1000" dirty="0">
+                          <a:solidFill>
+                            <a:srgbClr val="1A237E"/>
+                          </a:solidFill>
+                          <a:latin typeface="Calibri" panose="020F0502020204030204" pitchFamily="34" charset="0"/>
+                          <a:ea typeface="Calibri" panose="020F0502020204030204" pitchFamily="34" charset="-122"/>
+                          <a:cs typeface="Calibri" panose="020F0502020204030204" pitchFamily="34" charset="-120"/>
+                        </a:rPr>
+                        <a:t>California</a:t>
+                      </a:r>
+                      <a:endParaRPr lang="en-US" sz="1000" dirty="0">
+                        <a:latin typeface="Calibri" panose="020F0502020204030204" pitchFamily="34" charset="0"/>
+                        <a:ea typeface="Calibri" panose="020F0502020204030204" pitchFamily="34" charset="0"/>
+                        <a:cs typeface="Calibri" panose="020F0502020204030204" pitchFamily="34" charset="0"/>
+                      </a:endParaRPr>
+                    </a:p>
+                  </a:txBody>
+                  <a:tcPr>
+                    <a:lnL w="0" cap="flat" cmpd="sng" algn="ctr">
+                      <a:noFill/>
+                    </a:lnL>
+                    <a:lnR w="0" cap="flat" cmpd="sng" algn="ctr">
+                      <a:noFill/>
+                    </a:lnR>
+                    <a:lnT w="0" cap="flat" cmpd="sng" algn="ctr">
+                      <a:noFill/>
+                    </a:lnT>
+                    <a:lnB w="0" cap="flat" cmpd="sng" algn="ctr">
+                      <a:noFill/>
+                    </a:lnB>
+                    <a:solidFill>
+                      <a:srgbClr val="F5F5F5"/>
+                    </a:solidFill>
+                  </a:tcPr>
+                </a:tc>
+                <a:tc>
+                  <a:txBody>
+                    <a:bodyPr/>
+                    <a:lstStyle/>
+                    <a:p>
+                      <a:pPr marL="0" indent="0">
+                        <a:buNone/>
+                      </a:pPr>
+                      <a:r>
+                        <a:rPr lang="en-US" sz="1000" dirty="0">
+                          <a:solidFill>
+                            <a:srgbClr val="1A237E"/>
+                          </a:solidFill>
+                          <a:latin typeface="Calibri" panose="020F0502020204030204" pitchFamily="34" charset="0"/>
+                          <a:ea typeface="Calibri" panose="020F0502020204030204" pitchFamily="34" charset="-122"/>
+                          <a:cs typeface="Calibri" panose="020F0502020204030204" pitchFamily="34" charset="-120"/>
+                        </a:rPr>
+                        <a:t>13</a:t>
+                      </a:r>
+                      <a:endParaRPr lang="en-US" sz="1000" dirty="0">
+                        <a:latin typeface="Calibri" panose="020F0502020204030204" pitchFamily="34" charset="0"/>
+                        <a:ea typeface="Calibri" panose="020F0502020204030204" pitchFamily="34" charset="0"/>
+                        <a:cs typeface="Calibri" panose="020F0502020204030204" pitchFamily="34" charset="0"/>
+                      </a:endParaRPr>
+                    </a:p>
+                  </a:txBody>
+                  <a:tcPr>
+                    <a:lnL w="0" cap="flat" cmpd="sng" algn="ctr">
+                      <a:noFill/>
+                    </a:lnL>
+                    <a:lnR w="0" cap="flat" cmpd="sng" algn="ctr">
+                      <a:noFill/>
+                    </a:lnR>
+                    <a:lnT w="0" cap="flat" cmpd="sng" algn="ctr">
+                      <a:noFill/>
+                    </a:lnT>
+                    <a:lnB w="0" cap="flat" cmpd="sng" algn="ctr">
+                      <a:noFill/>
+                    </a:lnB>
+                    <a:solidFill>
+                      <a:srgbClr val="F5F5F5"/>
+                    </a:solidFill>
+                  </a:tcPr>
+                </a:tc>
+                <a:tc>
+                  <a:txBody>
+                    <a:bodyPr/>
+                    <a:lstStyle/>
+                    <a:p>
+                      <a:pPr marL="0" indent="0">
+                        <a:buNone/>
+                      </a:pPr>
+                      <a:r>
+                        <a:rPr lang="en-US" sz="1000" dirty="0">
+                          <a:solidFill>
+                            <a:srgbClr val="1A237E"/>
+                          </a:solidFill>
+                          <a:latin typeface="Calibri" panose="020F0502020204030204" pitchFamily="34" charset="0"/>
+                          <a:ea typeface="Calibri" panose="020F0502020204030204" pitchFamily="34" charset="-122"/>
+                          <a:cs typeface="Calibri" panose="020F0502020204030204" pitchFamily="34" charset="-120"/>
+                        </a:rPr>
+                        <a:t>62%</a:t>
+                      </a:r>
+                      <a:endParaRPr lang="en-US" sz="1000" dirty="0">
+                        <a:latin typeface="Calibri" panose="020F0502020204030204" pitchFamily="34" charset="0"/>
+                        <a:ea typeface="Calibri" panose="020F0502020204030204" pitchFamily="34" charset="0"/>
+                        <a:cs typeface="Calibri" panose="020F0502020204030204" pitchFamily="34" charset="0"/>
+                      </a:endParaRPr>
+                    </a:p>
+                  </a:txBody>
+                  <a:tcPr>
+                    <a:lnL w="0" cap="flat" cmpd="sng" algn="ctr">
+                      <a:noFill/>
+                    </a:lnL>
+                    <a:lnR w="0" cap="flat" cmpd="sng" algn="ctr">
+                      <a:noFill/>
+                    </a:lnR>
+                    <a:lnT w="0" cap="flat" cmpd="sng" algn="ctr">
+                      <a:noFill/>
+                    </a:lnT>
+                    <a:lnB w="0" cap="flat" cmpd="sng" algn="ctr">
+                      <a:noFill/>
+                    </a:lnB>
+                    <a:solidFill>
+                      <a:srgbClr val="F5F5F5"/>
+                    </a:solidFill>
+                  </a:tcPr>
+                </a:tc>
+              </a:tr>
+            </a:tbl>
+          </a:graphicData>
+        </a:graphic>
+      </p:graphicFrame>
+      <p:sp>
+        <p:nvSpPr>
+          <p:cNvPr id="8" name="Text 5"/>
+          <p:cNvSpPr/>
+          <p:nvPr/>
+        </p:nvSpPr>
+        <p:spPr>
+          <a:xfrm>
+            <a:off x="365760" y="3063240"/>
+            <a:ext cx="4754880" cy="256032"/>
+          </a:xfrm>
+          <a:prstGeom prst="rect">
+            <a:avLst/>
+          </a:prstGeom>
+          <a:noFill/>
+        </p:spPr>
+        <p:txBody>
+          <a:bodyPr wrap="square" lIns="0" tIns="0" rIns="0" bIns="0" rtlCol="0" anchor="ctr"/>
+          <a:lstStyle/>
+          <a:p>
+            <a:pPr marL="0" indent="0">
+              <a:buNone/>
+            </a:pPr>
+            <a:r>
+              <a:rPr lang="en-US" sz="1300" b="1" dirty="0">
+                <a:solidFill>
+                  <a:srgbClr val="1565C0"/>
+                </a:solidFill>
+                <a:latin typeface="Calibri" panose="020F0502020204030204" pitchFamily="34" charset="0"/>
+                <a:ea typeface="Calibri" panose="020F0502020204030204" pitchFamily="34" charset="-122"/>
+                <a:cs typeface="Calibri" panose="020F0502020204030204" pitchFamily="34" charset="-120"/>
+              </a:rPr>
+              <a:t>Proximity Analysis Findings</a:t>
+            </a:r>
+            <a:endParaRPr lang="en-US" sz="1300" dirty="0"/>
+          </a:p>
+        </p:txBody>
+      </p:sp>
+      <p:sp>
+        <p:nvSpPr>
+          <p:cNvPr id="9" name="Text 6"/>
+          <p:cNvSpPr/>
+          <p:nvPr/>
+        </p:nvSpPr>
+        <p:spPr>
+          <a:xfrm>
+            <a:off x="365760" y="3337560"/>
+            <a:ext cx="4754880" cy="1371600"/>
+          </a:xfrm>
+          <a:prstGeom prst="rect">
+            <a:avLst/>
+          </a:prstGeom>
+          <a:noFill/>
+        </p:spPr>
+        <p:txBody>
+          <a:bodyPr wrap="square" lIns="0" tIns="0" rIns="0" bIns="0" rtlCol="0" anchor="ctr"/>
+          <a:lstStyle/>
+          <a:p>
+            <a:pPr marL="127000" indent="-127000">
+              <a:buSzPct val="100000"/>
+              <a:buChar char="•"/>
+            </a:pPr>
+            <a:r>
+              <a:rPr lang="en-US" sz="1050" dirty="0">
+                <a:solidFill>
+                  <a:srgbClr val="1A237E"/>
+                </a:solidFill>
+                <a:latin typeface="Calibri" panose="020F0502020204030204" pitchFamily="34" charset="0"/>
+                <a:ea typeface="Calibri" panose="020F0502020204030204" pitchFamily="34" charset="-122"/>
+                <a:cs typeface="Calibri" panose="020F0502020204030204" pitchFamily="34" charset="-120"/>
+              </a:rPr>
+              <a:t>All sites located within 20 km of coastline (ocean proximity for safety)</a:t>
+            </a:r>
+            <a:endParaRPr lang="en-US" sz="1050" dirty="0"/>
+          </a:p>
+          <a:p>
+            <a:pPr marL="127000" indent="-127000">
+              <a:buSzPct val="100000"/>
+              <a:buChar char="•"/>
+            </a:pPr>
+            <a:r>
+              <a:rPr lang="en-US" sz="1050" dirty="0">
+                <a:solidFill>
+                  <a:srgbClr val="1A237E"/>
+                </a:solidFill>
+                <a:latin typeface="Calibri" panose="020F0502020204030204" pitchFamily="34" charset="0"/>
+                <a:ea typeface="Calibri" panose="020F0502020204030204" pitchFamily="34" charset="-122"/>
+                <a:cs typeface="Calibri" panose="020F0502020204030204" pitchFamily="34" charset="-120"/>
+              </a:rPr>
+              <a:t>Sites 50–100 km from populated cities (safety buffers maintained)</a:t>
+            </a:r>
+            <a:endParaRPr lang="en-US" sz="1050" dirty="0"/>
+          </a:p>
+          <a:p>
+            <a:pPr marL="127000" indent="-127000">
+              <a:buSzPct val="100000"/>
+              <a:buChar char="•"/>
+            </a:pPr>
+            <a:r>
+              <a:rPr lang="en-US" sz="1050" dirty="0">
+                <a:solidFill>
+                  <a:srgbClr val="1A237E"/>
+                </a:solidFill>
+                <a:latin typeface="Calibri" panose="020F0502020204030204" pitchFamily="34" charset="0"/>
+                <a:ea typeface="Calibri" panose="020F0502020204030204" pitchFamily="34" charset="-122"/>
+                <a:cs typeface="Calibri" panose="020F0502020204030204" pitchFamily="34" charset="-120"/>
+              </a:rPr>
+              <a:t>KSC closest to railway infrastructure — logistics advantage</a:t>
+            </a:r>
+            <a:endParaRPr lang="en-US" sz="1050" dirty="0"/>
+          </a:p>
+          <a:p>
+            <a:pPr marL="127000" indent="-127000">
+              <a:buSzPct val="100000"/>
+              <a:buChar char="•"/>
+            </a:pPr>
+            <a:r>
+              <a:rPr lang="en-US" sz="1050" dirty="0">
+                <a:solidFill>
+                  <a:srgbClr val="1A237E"/>
+                </a:solidFill>
+                <a:latin typeface="Calibri" panose="020F0502020204030204" pitchFamily="34" charset="0"/>
+                <a:ea typeface="Calibri" panose="020F0502020204030204" pitchFamily="34" charset="-122"/>
+                <a:cs typeface="Calibri" panose="020F0502020204030204" pitchFamily="34" charset="-120"/>
+              </a:rPr>
+              <a:t>VAFB optimized for polar/SSO orbits (Pacific launch corridor)</a:t>
+            </a:r>
+            <a:endParaRPr lang="en-US" sz="1050" dirty="0"/>
+          </a:p>
+        </p:txBody>
+      </p:sp>
+      <p:sp>
+        <p:nvSpPr>
+          <p:cNvPr id="7" name="Shape 7"/>
+          <p:cNvSpPr/>
+          <p:nvPr/>
+        </p:nvSpPr>
+        <p:spPr>
+          <a:xfrm>
+            <a:off x="5303520" y="1170432"/>
+            <a:ext cx="3566160" cy="3566160"/>
+          </a:xfrm>
+          <a:prstGeom prst="rect">
+            <a:avLst/>
+          </a:prstGeom>
+          <a:solidFill>
+            <a:srgbClr val="0D1B2A"/>
+          </a:solidFill>
+          <a:ln w="12700">
+            <a:solidFill>
+              <a:srgbClr val="00BCD4"/>
+            </a:solidFill>
+            <a:prstDash val="solid"/>
+          </a:ln>
+        </p:spPr>
+      </p:sp>
+      <p:sp>
+        <p:nvSpPr>
+          <p:cNvPr id="11" name="Text 8"/>
+          <p:cNvSpPr/>
+          <p:nvPr/>
+        </p:nvSpPr>
+        <p:spPr>
+          <a:xfrm>
+            <a:off x="5440680" y="1261872"/>
+            <a:ext cx="3291840" cy="256032"/>
+          </a:xfrm>
+          <a:prstGeom prst="rect">
+            <a:avLst/>
+          </a:prstGeom>
+          <a:noFill/>
+        </p:spPr>
+        <p:txBody>
+          <a:bodyPr wrap="square" lIns="0" tIns="0" rIns="0" bIns="0" rtlCol="0" anchor="ctr"/>
+          <a:lstStyle/>
+          <a:p>
+            <a:pPr marL="0" indent="0">
+              <a:buNone/>
+            </a:pPr>
+            <a:r>
+              <a:rPr lang="en-US" sz="1300" b="1" dirty="0">
+                <a:solidFill>
+                  <a:srgbClr val="00BCD4"/>
+                </a:solidFill>
+                <a:latin typeface="Calibri" panose="020F0502020204030204" pitchFamily="34" charset="0"/>
+                <a:ea typeface="Calibri" panose="020F0502020204030204" pitchFamily="34" charset="-122"/>
+                <a:cs typeface="Calibri" panose="020F0502020204030204" pitchFamily="34" charset="-120"/>
+              </a:rPr>
+              <a:t>Folium Map Features</a:t>
+            </a:r>
+            <a:endParaRPr lang="en-US" sz="1300" dirty="0"/>
+          </a:p>
+        </p:txBody>
+      </p:sp>
+      <p:sp>
+        <p:nvSpPr>
+          <p:cNvPr id="12" name="Text 9"/>
+          <p:cNvSpPr/>
+          <p:nvPr/>
+        </p:nvSpPr>
+        <p:spPr>
+          <a:xfrm>
+            <a:off x="5440680" y="1600200"/>
+            <a:ext cx="3291840" cy="384048"/>
+          </a:xfrm>
+          <a:prstGeom prst="rect">
+            <a:avLst/>
+          </a:prstGeom>
+          <a:noFill/>
+        </p:spPr>
+        <p:txBody>
+          <a:bodyPr wrap="square" lIns="0" tIns="0" rIns="0" bIns="0" rtlCol="0" anchor="ctr"/>
+          <a:lstStyle/>
+          <a:p>
+            <a:pPr marL="0" indent="0">
+              <a:buNone/>
+            </a:pPr>
+            <a:r>
+              <a:rPr lang="en-US" sz="1000" dirty="0">
+                <a:solidFill>
+                  <a:srgbClr val="FFFFFF"/>
+                </a:solidFill>
+                <a:latin typeface="Calibri" panose="020F0502020204030204" pitchFamily="34" charset="0"/>
+                <a:ea typeface="Calibri" panose="020F0502020204030204" pitchFamily="34" charset="-122"/>
+                <a:cs typeface="Calibri" panose="020F0502020204030204" pitchFamily="34" charset="-120"/>
+              </a:rPr>
+              <a:t>🟢 Green markers = successful landings</a:t>
+            </a:r>
+            <a:endParaRPr lang="en-US" sz="1000" dirty="0"/>
+          </a:p>
+        </p:txBody>
+      </p:sp>
+      <p:sp>
+        <p:nvSpPr>
+          <p:cNvPr id="13" name="Text 10"/>
+          <p:cNvSpPr/>
+          <p:nvPr/>
+        </p:nvSpPr>
+        <p:spPr>
+          <a:xfrm>
+            <a:off x="5440680" y="2057400"/>
+            <a:ext cx="3291840" cy="384048"/>
+          </a:xfrm>
+          <a:prstGeom prst="rect">
+            <a:avLst/>
+          </a:prstGeom>
+          <a:noFill/>
+        </p:spPr>
+        <p:txBody>
+          <a:bodyPr wrap="square" lIns="0" tIns="0" rIns="0" bIns="0" rtlCol="0" anchor="ctr"/>
+          <a:lstStyle/>
+          <a:p>
+            <a:pPr marL="0" indent="0">
+              <a:buNone/>
+            </a:pPr>
+            <a:r>
+              <a:rPr lang="en-US" sz="1000" dirty="0">
+                <a:solidFill>
+                  <a:srgbClr val="FFFFFF"/>
+                </a:solidFill>
+                <a:latin typeface="Calibri" panose="020F0502020204030204" pitchFamily="34" charset="0"/>
+                <a:ea typeface="Calibri" panose="020F0502020204030204" pitchFamily="34" charset="-122"/>
+                <a:cs typeface="Calibri" panose="020F0502020204030204" pitchFamily="34" charset="-120"/>
+              </a:rPr>
+              <a:t>🔴 Red markers = failed landings</a:t>
+            </a:r>
+            <a:endParaRPr lang="en-US" sz="1000" dirty="0"/>
+          </a:p>
+        </p:txBody>
+      </p:sp>
+      <p:sp>
+        <p:nvSpPr>
+          <p:cNvPr id="14" name="Text 11"/>
+          <p:cNvSpPr/>
+          <p:nvPr/>
+        </p:nvSpPr>
+        <p:spPr>
+          <a:xfrm>
+            <a:off x="5440680" y="2514600"/>
+            <a:ext cx="3291840" cy="384048"/>
+          </a:xfrm>
+          <a:prstGeom prst="rect">
+            <a:avLst/>
+          </a:prstGeom>
+          <a:noFill/>
+        </p:spPr>
+        <p:txBody>
+          <a:bodyPr wrap="square" lIns="0" tIns="0" rIns="0" bIns="0" rtlCol="0" anchor="ctr"/>
+          <a:lstStyle/>
+          <a:p>
+            <a:pPr marL="0" indent="0">
+              <a:buNone/>
+            </a:pPr>
+            <a:r>
+              <a:rPr lang="en-US" sz="1000" dirty="0">
+                <a:solidFill>
+                  <a:srgbClr val="FFFFFF"/>
+                </a:solidFill>
+                <a:latin typeface="Calibri" panose="020F0502020204030204" pitchFamily="34" charset="0"/>
+                <a:ea typeface="Calibri" panose="020F0502020204030204" pitchFamily="34" charset="-122"/>
+                <a:cs typeface="Calibri" panose="020F0502020204030204" pitchFamily="34" charset="-120"/>
+              </a:rPr>
+              <a:t>⭕ Circle markers = launch sites with pop-up details</a:t>
+            </a:r>
+            <a:endParaRPr lang="en-US" sz="1000" dirty="0"/>
+          </a:p>
+        </p:txBody>
+      </p:sp>
+      <p:sp>
+        <p:nvSpPr>
+          <p:cNvPr id="15" name="Text 12"/>
+          <p:cNvSpPr/>
+          <p:nvPr/>
+        </p:nvSpPr>
+        <p:spPr>
+          <a:xfrm>
+            <a:off x="5440680" y="2971800"/>
+            <a:ext cx="3291840" cy="384048"/>
+          </a:xfrm>
+          <a:prstGeom prst="rect">
+            <a:avLst/>
+          </a:prstGeom>
+          <a:noFill/>
+        </p:spPr>
+        <p:txBody>
+          <a:bodyPr wrap="square" lIns="0" tIns="0" rIns="0" bIns="0" rtlCol="0" anchor="ctr"/>
+          <a:lstStyle/>
+          <a:p>
+            <a:pPr marL="0" indent="0">
+              <a:buNone/>
+            </a:pPr>
+            <a:r>
+              <a:rPr lang="en-US" sz="1000" dirty="0">
+                <a:solidFill>
+                  <a:srgbClr val="FFFFFF"/>
+                </a:solidFill>
+                <a:latin typeface="Calibri" panose="020F0502020204030204" pitchFamily="34" charset="0"/>
+                <a:ea typeface="Calibri" panose="020F0502020204030204" pitchFamily="34" charset="-122"/>
+                <a:cs typeface="Calibri" panose="020F0502020204030204" pitchFamily="34" charset="-120"/>
+              </a:rPr>
+              <a:t>📏 Distance lines — coastline, city, railways</a:t>
+            </a:r>
+            <a:endParaRPr lang="en-US" sz="1000" dirty="0"/>
+          </a:p>
+        </p:txBody>
+      </p:sp>
+      <p:sp>
+        <p:nvSpPr>
+          <p:cNvPr id="16" name="Text 13"/>
+          <p:cNvSpPr/>
+          <p:nvPr/>
+        </p:nvSpPr>
+        <p:spPr>
+          <a:xfrm>
+            <a:off x="5440680" y="3429000"/>
+            <a:ext cx="3291840" cy="384048"/>
+          </a:xfrm>
+          <a:prstGeom prst="rect">
+            <a:avLst/>
+          </a:prstGeom>
+          <a:noFill/>
+        </p:spPr>
+        <p:txBody>
+          <a:bodyPr wrap="square" lIns="0" tIns="0" rIns="0" bIns="0" rtlCol="0" anchor="ctr"/>
+          <a:lstStyle/>
+          <a:p>
+            <a:pPr marL="0" indent="0">
+              <a:buNone/>
+            </a:pPr>
+            <a:r>
+              <a:rPr lang="en-US" sz="1000" dirty="0">
+                <a:solidFill>
+                  <a:srgbClr val="FFFFFF"/>
+                </a:solidFill>
+                <a:latin typeface="Calibri" panose="020F0502020204030204" pitchFamily="34" charset="0"/>
+                <a:ea typeface="Calibri" panose="020F0502020204030204" pitchFamily="34" charset="-122"/>
+                <a:cs typeface="Calibri" panose="020F0502020204030204" pitchFamily="34" charset="-120"/>
+              </a:rPr>
+              <a:t>🗺️ Cluster view for dense launch areas</a:t>
+            </a:r>
+            <a:endParaRPr lang="en-US" sz="1000" dirty="0"/>
+          </a:p>
+        </p:txBody>
+      </p:sp>
+      <p:sp>
+        <p:nvSpPr>
+          <p:cNvPr id="17" name="Text 14"/>
+          <p:cNvSpPr/>
+          <p:nvPr/>
+        </p:nvSpPr>
+        <p:spPr>
+          <a:xfrm>
+            <a:off x="5440680" y="3886200"/>
+            <a:ext cx="3291840" cy="384048"/>
+          </a:xfrm>
+          <a:prstGeom prst="rect">
+            <a:avLst/>
+          </a:prstGeom>
+          <a:noFill/>
+        </p:spPr>
+        <p:txBody>
+          <a:bodyPr wrap="square" lIns="0" tIns="0" rIns="0" bIns="0" rtlCol="0" anchor="ctr"/>
+          <a:lstStyle/>
+          <a:p>
+            <a:pPr marL="0" indent="0">
+              <a:buNone/>
+            </a:pPr>
+            <a:r>
+              <a:rPr lang="en-US" sz="1000" dirty="0">
+                <a:solidFill>
+                  <a:srgbClr val="FFFFFF"/>
+                </a:solidFill>
+                <a:latin typeface="Calibri" panose="020F0502020204030204" pitchFamily="34" charset="0"/>
+                <a:ea typeface="Calibri" panose="020F0502020204030204" pitchFamily="34" charset="-122"/>
+                <a:cs typeface="Calibri" panose="020F0502020204030204" pitchFamily="34" charset="-120"/>
+              </a:rPr>
+              <a:t>Filterable by mission outcome for pattern analysis</a:t>
+            </a:r>
+            <a:endParaRPr lang="en-US" sz="1000" dirty="0"/>
+          </a:p>
+        </p:txBody>
+      </p:sp>
+      <p:sp>
+        <p:nvSpPr>
+          <p:cNvPr id="18" name="Text 15"/>
+          <p:cNvSpPr/>
+          <p:nvPr/>
+        </p:nvSpPr>
+        <p:spPr>
+          <a:xfrm>
+            <a:off x="5440680" y="4389120"/>
+            <a:ext cx="3291840" cy="256032"/>
+          </a:xfrm>
+          <a:prstGeom prst="rect">
+            <a:avLst/>
+          </a:prstGeom>
+          <a:noFill/>
+        </p:spPr>
+        <p:txBody>
+          <a:bodyPr wrap="square" lIns="0" tIns="0" rIns="0" bIns="0" rtlCol="0" anchor="ctr"/>
+          <a:lstStyle/>
+          <a:p>
+            <a:pPr marL="0" indent="0">
+              <a:buNone/>
+            </a:pPr>
+            <a:r>
+              <a:rPr lang="en-US" sz="800" dirty="0">
+                <a:solidFill>
+                  <a:srgbClr val="90CAF9"/>
+                </a:solidFill>
+                <a:latin typeface="Calibri" panose="020F0502020204030204" pitchFamily="34" charset="0"/>
+                <a:ea typeface="Calibri" panose="020F0502020204030204" pitchFamily="34" charset="-122"/>
+                <a:cs typeface="Calibri" panose="020F0502020204030204" pitchFamily="34" charset="-120"/>
+              </a:rPr>
+              <a:t>View live map: https://github.com/codemewithc/Python-projects/blob/main/lab_jupyter_launch_site_location.ipynb</a:t>
+            </a:r>
+            <a:endParaRPr lang="en-US" sz="800" dirty="0"/>
+          </a:p>
+        </p:txBody>
+      </p:sp>
+      <p:sp>
+        <p:nvSpPr>
+          <p:cNvPr id="19" name="Text 16"/>
+          <p:cNvSpPr/>
+          <p:nvPr/>
+        </p:nvSpPr>
+        <p:spPr>
+          <a:xfrm>
+            <a:off x="274320" y="4892040"/>
+            <a:ext cx="8229600" cy="201168"/>
+          </a:xfrm>
+          <a:prstGeom prst="rect">
+            <a:avLst/>
+          </a:prstGeom>
+          <a:noFill/>
+        </p:spPr>
+        <p:txBody>
+          <a:bodyPr wrap="square" rtlCol="0" anchor="ctr"/>
+          <a:lstStyle/>
+          <a:p>
+            <a:pPr marL="0" indent="0">
+              <a:buNone/>
+            </a:pPr>
+            <a:r>
+              <a:rPr lang="en-US" sz="800" dirty="0">
+                <a:solidFill>
+                  <a:srgbClr val="546E7A"/>
+                </a:solidFill>
+                <a:latin typeface="Calibri" panose="020F0502020204030204" pitchFamily="34" charset="0"/>
+                <a:ea typeface="Calibri" panose="020F0502020204030204" pitchFamily="34" charset="-122"/>
+                <a:cs typeface="Calibri" panose="020F0502020204030204" pitchFamily="34" charset="-120"/>
+              </a:rPr>
+              <a:t>SpaceX Capstone Project  |  IBM Data Science  |  https://github.com/codemewithc/Python-projects</a:t>
+            </a:r>
+            <a:endParaRPr lang="en-US" sz="800" dirty="0"/>
+          </a:p>
+        </p:txBody>
+      </p:sp>
+      <p:sp>
+        <p:nvSpPr>
+          <p:cNvPr id="20" name="Text 17"/>
+          <p:cNvSpPr/>
+          <p:nvPr/>
+        </p:nvSpPr>
+        <p:spPr>
+          <a:xfrm>
+            <a:off x="8686800" y="4892040"/>
+            <a:ext cx="365760" cy="201168"/>
+          </a:xfrm>
+          <a:prstGeom prst="rect">
+            <a:avLst/>
+          </a:prstGeom>
+          <a:noFill/>
+        </p:spPr>
+        <p:txBody>
+          <a:bodyPr wrap="square" rtlCol="0" anchor="ctr"/>
+          <a:lstStyle/>
+          <a:p>
+            <a:pPr marL="0" indent="0" algn="r">
+              <a:buNone/>
+            </a:pPr>
+            <a:r>
+              <a:rPr lang="en-US" sz="800" dirty="0">
+                <a:solidFill>
+                  <a:srgbClr val="546E7A"/>
+                </a:solidFill>
+                <a:latin typeface="Calibri" panose="020F0502020204030204" pitchFamily="34" charset="0"/>
+                <a:ea typeface="Calibri" panose="020F0502020204030204" pitchFamily="34" charset="-122"/>
+                <a:cs typeface="Calibri" panose="020F0502020204030204" pitchFamily="34" charset="-120"/>
+              </a:rPr>
+              <a:t>9</a:t>
+            </a:r>
+            <a:endParaRPr lang="en-US" sz="800" dirty="0"/>
+          </a:p>
+        </p:txBody>
+      </p:sp>
+    </p:spTree>
+  </p:cSld>
+  <p:clrMapOvr>
+    <a:masterClrMapping/>
+  </p:clrMapOvr>
+</p:sld>
+</file>
+
+<file path=ppt/slides/slide12.xml><?xml version="1.0" encoding="utf-8"?>
+<p:sld xmlns:a="http://schemas.openxmlformats.org/drawingml/2006/main" xmlns:r="http://schemas.openxmlformats.org/officeDocument/2006/relationships" xmlns:p="http://schemas.openxmlformats.org/presentationml/2006/main">
+  <p:cSld>
+    <p:bg>
+      <p:bgPr>
+        <a:solidFill>
+          <a:srgbClr val="F0F4F8"/>
+        </a:solidFill>
+        <a:effectLst/>
+      </p:bgPr>
+    </p:bg>
+    <p:spTree>
+      <p:nvGrpSpPr>
+        <p:cNvPr id="1" name=""/>
+        <p:cNvGrpSpPr/>
+        <p:nvPr/>
+      </p:nvGrpSpPr>
+      <p:grpSpPr>
+        <a:xfrm>
+          <a:off x="0" y="0"/>
+          <a:ext cx="0" cy="0"/>
+          <a:chOff x="0" y="0"/>
+          <a:chExt cx="0" cy="0"/>
+        </a:xfrm>
+      </p:grpSpPr>
+      <p:sp>
+        <p:nvSpPr>
+          <p:cNvPr id="2" name="Shape 0"/>
+          <p:cNvSpPr/>
+          <p:nvPr/>
+        </p:nvSpPr>
+        <p:spPr>
+          <a:xfrm>
+            <a:off x="365760" y="228600"/>
+            <a:ext cx="64008" cy="502920"/>
+          </a:xfrm>
+          <a:prstGeom prst="rect">
+            <a:avLst/>
+          </a:prstGeom>
+          <a:solidFill>
+            <a:srgbClr val="00BCD4"/>
+          </a:solidFill>
+          <a:ln w="12700">
+            <a:solidFill>
+              <a:srgbClr val="00BCD4"/>
+            </a:solidFill>
+            <a:prstDash val="solid"/>
+          </a:ln>
+        </p:spPr>
+      </p:sp>
+      <p:sp>
+        <p:nvSpPr>
+          <p:cNvPr id="3" name="Text 1"/>
+          <p:cNvSpPr/>
+          <p:nvPr/>
+        </p:nvSpPr>
+        <p:spPr>
+          <a:xfrm>
+            <a:off x="548640" y="182880"/>
+            <a:ext cx="8229600" cy="594360"/>
+          </a:xfrm>
+          <a:prstGeom prst="rect">
+            <a:avLst/>
+          </a:prstGeom>
+          <a:noFill/>
+        </p:spPr>
+        <p:txBody>
+          <a:bodyPr wrap="square" lIns="0" tIns="0" rIns="0" bIns="0" rtlCol="0" anchor="ctr"/>
+          <a:lstStyle/>
+          <a:p>
+            <a:pPr marL="0" indent="0">
+              <a:buNone/>
+            </a:pPr>
+            <a:r>
+              <a:rPr lang="en-US" sz="2600" b="1" dirty="0">
+                <a:solidFill>
+                  <a:srgbClr val="0D1B2A"/>
+                </a:solidFill>
+                <a:latin typeface="Calibri" panose="020F0502020204030204" pitchFamily="34" charset="0"/>
+                <a:ea typeface="Calibri" panose="020F0502020204030204" pitchFamily="34" charset="-122"/>
+                <a:cs typeface="Calibri" panose="020F0502020204030204" pitchFamily="34" charset="-120"/>
+              </a:rPr>
               <a:t>Interactive Visual Analytics — Plotly Dash Dashboard</a:t>
             </a:r>
             <a:endParaRPr lang="en-US" sz="2600" dirty="0"/>
@@ -5146,7 +6839,7 @@
 </p:sld>
 </file>
 
-<file path=ppt/slides/slide11.xml><?xml version="1.0" encoding="utf-8"?>
+<file path=ppt/slides/slide13.xml><?xml version="1.0" encoding="utf-8"?>
 <p:sld xmlns:a="http://schemas.openxmlformats.org/drawingml/2006/main" xmlns:r="http://schemas.openxmlformats.org/officeDocument/2006/relationships" xmlns:p="http://schemas.openxmlformats.org/presentationml/2006/main">
   <p:cSld>
     <p:bg>
@@ -6925,7 +8618,7 @@
 </p:sld>
 </file>
 
-<file path=ppt/slides/slide12.xml><?xml version="1.0" encoding="utf-8"?>
+<file path=ppt/slides/slide14.xml><?xml version="1.0" encoding="utf-8"?>
 <p:sld xmlns:a="http://schemas.openxmlformats.org/drawingml/2006/main" xmlns:r="http://schemas.openxmlformats.org/officeDocument/2006/relationships" xmlns:p="http://schemas.openxmlformats.org/presentationml/2006/main">
   <p:cSld>
     <p:bg>
@@ -7925,7 +9618,7 @@
 </p:sld>
 </file>
 
-<file path=ppt/slides/slide13.xml><?xml version="1.0" encoding="utf-8"?>
+<file path=ppt/slides/slide15.xml><?xml version="1.0" encoding="utf-8"?>
 <p:sld xmlns:a="http://schemas.openxmlformats.org/drawingml/2006/main" xmlns:r="http://schemas.openxmlformats.org/officeDocument/2006/relationships" xmlns:p="http://schemas.openxmlformats.org/presentationml/2006/main">
   <p:cSld>
     <p:bg>
@@ -16374,1644 +18067,37 @@
 <file path=ppt/slides/slide9.xml><?xml version="1.0" encoding="utf-8"?>
 <p:sld xmlns:a="http://schemas.openxmlformats.org/drawingml/2006/main" xmlns:r="http://schemas.openxmlformats.org/officeDocument/2006/relationships" xmlns:p="http://schemas.openxmlformats.org/presentationml/2006/main">
   <p:cSld>
-    <p:bg>
-      <p:bgPr>
-        <a:solidFill>
-          <a:srgbClr val="F0F4F8"/>
-        </a:solidFill>
-        <a:effectLst/>
-      </p:bgPr>
-    </p:bg>
     <p:spTree>
       <p:nvGrpSpPr>
         <p:cNvPr id="1" name=""/>
         <p:cNvGrpSpPr/>
         <p:nvPr/>
       </p:nvGrpSpPr>
-      <p:grpSpPr>
-        <a:xfrm>
-          <a:off x="0" y="0"/>
-          <a:ext cx="0" cy="0"/>
-          <a:chOff x="0" y="0"/>
-          <a:chExt cx="0" cy="0"/>
-        </a:xfrm>
-      </p:grpSpPr>
-      <p:sp>
-        <p:nvSpPr>
-          <p:cNvPr id="2" name="Shape 0"/>
-          <p:cNvSpPr/>
-          <p:nvPr/>
-        </p:nvSpPr>
-        <p:spPr>
-          <a:xfrm>
-            <a:off x="365760" y="228600"/>
-            <a:ext cx="64008" cy="502920"/>
-          </a:xfrm>
-          <a:prstGeom prst="rect">
-            <a:avLst/>
-          </a:prstGeom>
-          <a:solidFill>
-            <a:srgbClr val="00BCD4"/>
-          </a:solidFill>
-          <a:ln w="12700">
-            <a:solidFill>
-              <a:srgbClr val="00BCD4"/>
-            </a:solidFill>
-            <a:prstDash val="solid"/>
-          </a:ln>
-        </p:spPr>
-      </p:sp>
-      <p:sp>
-        <p:nvSpPr>
-          <p:cNvPr id="3" name="Text 1"/>
-          <p:cNvSpPr/>
-          <p:nvPr/>
-        </p:nvSpPr>
-        <p:spPr>
-          <a:xfrm>
-            <a:off x="548640" y="182880"/>
-            <a:ext cx="8229600" cy="594360"/>
-          </a:xfrm>
-          <a:prstGeom prst="rect">
-            <a:avLst/>
-          </a:prstGeom>
-          <a:noFill/>
-        </p:spPr>
-        <p:txBody>
-          <a:bodyPr wrap="square" lIns="0" tIns="0" rIns="0" bIns="0" rtlCol="0" anchor="ctr"/>
-          <a:lstStyle/>
-          <a:p>
-            <a:pPr marL="0" indent="0">
-              <a:buNone/>
-            </a:pPr>
-            <a:r>
-              <a:rPr lang="en-US" sz="2600" b="1" dirty="0">
-                <a:solidFill>
-                  <a:srgbClr val="0D1B2A"/>
-                </a:solidFill>
-                <a:latin typeface="Calibri" panose="020F0502020204030204" pitchFamily="34" charset="0"/>
-                <a:ea typeface="Calibri" panose="020F0502020204030204" pitchFamily="34" charset="-122"/>
-                <a:cs typeface="Calibri" panose="020F0502020204030204" pitchFamily="34" charset="-120"/>
-              </a:rPr>
-              <a:t>Interactive Visual Analytics — Folium Maps</a:t>
-            </a:r>
-            <a:endParaRPr lang="en-US" sz="2600" dirty="0"/>
-          </a:p>
-        </p:txBody>
-      </p:sp>
-      <p:sp>
-        <p:nvSpPr>
-          <p:cNvPr id="4" name="Text 2"/>
-          <p:cNvSpPr/>
-          <p:nvPr/>
-        </p:nvSpPr>
-        <p:spPr>
-          <a:xfrm>
-            <a:off x="548640" y="749808"/>
-            <a:ext cx="8229600" cy="292608"/>
-          </a:xfrm>
-          <a:prstGeom prst="rect">
-            <a:avLst/>
-          </a:prstGeom>
-          <a:noFill/>
-        </p:spPr>
-        <p:txBody>
-          <a:bodyPr wrap="square" lIns="0" tIns="0" rIns="0" bIns="0" rtlCol="0" anchor="ctr"/>
-          <a:lstStyle/>
-          <a:p>
-            <a:pPr marL="0" indent="0">
-              <a:buNone/>
-            </a:pPr>
-            <a:r>
-              <a:rPr lang="en-US" sz="1300" dirty="0">
-                <a:solidFill>
-                  <a:srgbClr val="546E7A"/>
-                </a:solidFill>
-                <a:latin typeface="Calibri" panose="020F0502020204030204" pitchFamily="34" charset="0"/>
-                <a:ea typeface="Calibri" panose="020F0502020204030204" pitchFamily="34" charset="-122"/>
-                <a:cs typeface="Calibri" panose="020F0502020204030204" pitchFamily="34" charset="-120"/>
-              </a:rPr>
-              <a:t>Launch site mapping &amp; proximity analysis · GitHub: https://github.com/codemewithc/Python-projects</a:t>
-            </a:r>
-            <a:endParaRPr lang="en-US" sz="1300" dirty="0"/>
-          </a:p>
-        </p:txBody>
-      </p:sp>
-      <p:sp>
-        <p:nvSpPr>
-          <p:cNvPr id="5" name="Shape 3"/>
-          <p:cNvSpPr/>
-          <p:nvPr/>
-        </p:nvSpPr>
-        <p:spPr>
-          <a:xfrm>
-            <a:off x="365760" y="1051560"/>
-            <a:ext cx="8412480" cy="22860"/>
-          </a:xfrm>
-          <a:prstGeom prst="rect">
-            <a:avLst/>
-          </a:prstGeom>
-          <a:solidFill>
-            <a:srgbClr val="00BCD4"/>
-          </a:solidFill>
-          <a:ln w="12700">
-            <a:solidFill>
-              <a:srgbClr val="00BCD4"/>
-            </a:solidFill>
-            <a:prstDash val="solid"/>
-          </a:ln>
-        </p:spPr>
-      </p:sp>
-      <p:sp>
-        <p:nvSpPr>
-          <p:cNvPr id="6" name="Text 4"/>
-          <p:cNvSpPr/>
-          <p:nvPr/>
-        </p:nvSpPr>
-        <p:spPr>
-          <a:xfrm>
-            <a:off x="365760" y="1188720"/>
-            <a:ext cx="4754880" cy="256032"/>
-          </a:xfrm>
-          <a:prstGeom prst="rect">
-            <a:avLst/>
-          </a:prstGeom>
-          <a:noFill/>
-        </p:spPr>
-        <p:txBody>
-          <a:bodyPr wrap="square" lIns="0" tIns="0" rIns="0" bIns="0" rtlCol="0" anchor="ctr"/>
-          <a:lstStyle/>
-          <a:p>
-            <a:pPr marL="0" indent="0">
-              <a:buNone/>
-            </a:pPr>
-            <a:r>
-              <a:rPr lang="en-US" sz="1300" b="1" dirty="0">
-                <a:solidFill>
-                  <a:srgbClr val="1565C0"/>
-                </a:solidFill>
-                <a:latin typeface="Calibri" panose="020F0502020204030204" pitchFamily="34" charset="0"/>
-                <a:ea typeface="Calibri" panose="020F0502020204030204" pitchFamily="34" charset="-122"/>
-                <a:cs typeface="Calibri" panose="020F0502020204030204" pitchFamily="34" charset="-120"/>
-              </a:rPr>
-              <a:t>Launch Sites Mapped</a:t>
-            </a:r>
-            <a:endParaRPr lang="en-US" sz="1300" dirty="0"/>
-          </a:p>
-        </p:txBody>
-      </p:sp>
-      <p:graphicFrame>
-        <p:nvGraphicFramePr>
-          <p:cNvPr id="10" name="Table 0"/>
-          <p:cNvGraphicFramePr>
-            <a:graphicFrameLocks noGrp="1"/>
-          </p:cNvGraphicFramePr>
-          <p:nvPr/>
-        </p:nvGraphicFramePr>
-        <p:xfrm>
-          <a:off x="365760" y="1481328"/>
-          <a:ext cx="4754880" cy="1508760"/>
-        </p:xfrm>
-        <a:graphic>
-          <a:graphicData uri="http://schemas.openxmlformats.org/drawingml/2006/table">
-            <a:tbl>
-              <a:tblPr/>
-              <a:tblGrid>
-                <a:gridCol w="1463040"/>
-                <a:gridCol w="1188720"/>
-                <a:gridCol w="1005840"/>
-                <a:gridCol w="1097280"/>
-              </a:tblGrid>
-              <a:tr h="301752">
-                <a:tc>
-                  <a:txBody>
-                    <a:bodyPr/>
-                    <a:lstStyle/>
-                    <a:p>
-                      <a:pPr marL="0" indent="0">
-                        <a:buNone/>
-                      </a:pPr>
-                      <a:r>
-                        <a:rPr lang="en-US" sz="1000" b="1" dirty="0">
-                          <a:solidFill>
-                            <a:srgbClr val="FFFFFF"/>
-                          </a:solidFill>
-                          <a:latin typeface="Calibri" panose="020F0502020204030204" pitchFamily="34" charset="0"/>
-                          <a:ea typeface="Calibri" panose="020F0502020204030204" pitchFamily="34" charset="-122"/>
-                          <a:cs typeface="Calibri" panose="020F0502020204030204" pitchFamily="34" charset="-120"/>
-                        </a:rPr>
-                        <a:t>Site</a:t>
-                      </a:r>
-                      <a:endParaRPr lang="en-US" sz="1000" dirty="0">
-                        <a:latin typeface="Calibri" panose="020F0502020204030204" pitchFamily="34" charset="0"/>
-                        <a:ea typeface="Calibri" panose="020F0502020204030204" pitchFamily="34" charset="0"/>
-                        <a:cs typeface="Calibri" panose="020F0502020204030204" pitchFamily="34" charset="0"/>
-                      </a:endParaRPr>
-                    </a:p>
-                  </a:txBody>
-                  <a:tcPr>
-                    <a:lnL w="0" cap="flat" cmpd="sng" algn="ctr">
-                      <a:noFill/>
-                    </a:lnL>
-                    <a:lnR w="0" cap="flat" cmpd="sng" algn="ctr">
-                      <a:noFill/>
-                    </a:lnR>
-                    <a:lnT w="0" cap="flat" cmpd="sng" algn="ctr">
-                      <a:noFill/>
-                    </a:lnT>
-                    <a:lnB w="0" cap="flat" cmpd="sng" algn="ctr">
-                      <a:noFill/>
-                    </a:lnB>
-                    <a:solidFill>
-                      <a:srgbClr val="1565C0"/>
-                    </a:solidFill>
-                  </a:tcPr>
-                </a:tc>
-                <a:tc>
-                  <a:txBody>
-                    <a:bodyPr/>
-                    <a:lstStyle/>
-                    <a:p>
-                      <a:pPr marL="0" indent="0">
-                        <a:buNone/>
-                      </a:pPr>
-                      <a:r>
-                        <a:rPr lang="en-US" sz="1000" b="1" dirty="0">
-                          <a:solidFill>
-                            <a:srgbClr val="FFFFFF"/>
-                          </a:solidFill>
-                          <a:latin typeface="Calibri" panose="020F0502020204030204" pitchFamily="34" charset="0"/>
-                          <a:ea typeface="Calibri" panose="020F0502020204030204" pitchFamily="34" charset="-122"/>
-                          <a:cs typeface="Calibri" panose="020F0502020204030204" pitchFamily="34" charset="-120"/>
-                        </a:rPr>
-                        <a:t>State</a:t>
-                      </a:r>
-                      <a:endParaRPr lang="en-US" sz="1000" dirty="0">
-                        <a:latin typeface="Calibri" panose="020F0502020204030204" pitchFamily="34" charset="0"/>
-                        <a:ea typeface="Calibri" panose="020F0502020204030204" pitchFamily="34" charset="0"/>
-                        <a:cs typeface="Calibri" panose="020F0502020204030204" pitchFamily="34" charset="0"/>
-                      </a:endParaRPr>
-                    </a:p>
-                  </a:txBody>
-                  <a:tcPr>
-                    <a:lnL w="0" cap="flat" cmpd="sng" algn="ctr">
-                      <a:noFill/>
-                    </a:lnL>
-                    <a:lnR w="0" cap="flat" cmpd="sng" algn="ctr">
-                      <a:noFill/>
-                    </a:lnR>
-                    <a:lnT w="0" cap="flat" cmpd="sng" algn="ctr">
-                      <a:noFill/>
-                    </a:lnT>
-                    <a:lnB w="0" cap="flat" cmpd="sng" algn="ctr">
-                      <a:noFill/>
-                    </a:lnB>
-                    <a:solidFill>
-                      <a:srgbClr val="1565C0"/>
-                    </a:solidFill>
-                  </a:tcPr>
-                </a:tc>
-                <a:tc>
-                  <a:txBody>
-                    <a:bodyPr/>
-                    <a:lstStyle/>
-                    <a:p>
-                      <a:pPr marL="0" indent="0">
-                        <a:buNone/>
-                      </a:pPr>
-                      <a:r>
-                        <a:rPr lang="en-US" sz="1000" b="1" dirty="0">
-                          <a:solidFill>
-                            <a:srgbClr val="FFFFFF"/>
-                          </a:solidFill>
-                          <a:latin typeface="Calibri" panose="020F0502020204030204" pitchFamily="34" charset="0"/>
-                          <a:ea typeface="Calibri" panose="020F0502020204030204" pitchFamily="34" charset="-122"/>
-                          <a:cs typeface="Calibri" panose="020F0502020204030204" pitchFamily="34" charset="-120"/>
-                        </a:rPr>
-                        <a:t>Launches</a:t>
-                      </a:r>
-                      <a:endParaRPr lang="en-US" sz="1000" dirty="0">
-                        <a:latin typeface="Calibri" panose="020F0502020204030204" pitchFamily="34" charset="0"/>
-                        <a:ea typeface="Calibri" panose="020F0502020204030204" pitchFamily="34" charset="0"/>
-                        <a:cs typeface="Calibri" panose="020F0502020204030204" pitchFamily="34" charset="0"/>
-                      </a:endParaRPr>
-                    </a:p>
-                  </a:txBody>
-                  <a:tcPr>
-                    <a:lnL w="0" cap="flat" cmpd="sng" algn="ctr">
-                      <a:noFill/>
-                    </a:lnL>
-                    <a:lnR w="0" cap="flat" cmpd="sng" algn="ctr">
-                      <a:noFill/>
-                    </a:lnR>
-                    <a:lnT w="0" cap="flat" cmpd="sng" algn="ctr">
-                      <a:noFill/>
-                    </a:lnT>
-                    <a:lnB w="0" cap="flat" cmpd="sng" algn="ctr">
-                      <a:noFill/>
-                    </a:lnB>
-                    <a:solidFill>
-                      <a:srgbClr val="1565C0"/>
-                    </a:solidFill>
-                  </a:tcPr>
-                </a:tc>
-                <a:tc>
-                  <a:txBody>
-                    <a:bodyPr/>
-                    <a:lstStyle/>
-                    <a:p>
-                      <a:pPr marL="0" indent="0">
-                        <a:buNone/>
-                      </a:pPr>
-                      <a:r>
-                        <a:rPr lang="en-US" sz="1000" b="1" dirty="0">
-                          <a:solidFill>
-                            <a:srgbClr val="FFFFFF"/>
-                          </a:solidFill>
-                          <a:latin typeface="Calibri" panose="020F0502020204030204" pitchFamily="34" charset="0"/>
-                          <a:ea typeface="Calibri" panose="020F0502020204030204" pitchFamily="34" charset="-122"/>
-                          <a:cs typeface="Calibri" panose="020F0502020204030204" pitchFamily="34" charset="-120"/>
-                        </a:rPr>
-                        <a:t>Success%</a:t>
-                      </a:r>
-                      <a:endParaRPr lang="en-US" sz="1000" dirty="0">
-                        <a:latin typeface="Calibri" panose="020F0502020204030204" pitchFamily="34" charset="0"/>
-                        <a:ea typeface="Calibri" panose="020F0502020204030204" pitchFamily="34" charset="0"/>
-                        <a:cs typeface="Calibri" panose="020F0502020204030204" pitchFamily="34" charset="0"/>
-                      </a:endParaRPr>
-                    </a:p>
-                  </a:txBody>
-                  <a:tcPr>
-                    <a:lnL w="0" cap="flat" cmpd="sng" algn="ctr">
-                      <a:noFill/>
-                    </a:lnL>
-                    <a:lnR w="0" cap="flat" cmpd="sng" algn="ctr">
-                      <a:noFill/>
-                    </a:lnR>
-                    <a:lnT w="0" cap="flat" cmpd="sng" algn="ctr">
-                      <a:noFill/>
-                    </a:lnT>
-                    <a:lnB w="0" cap="flat" cmpd="sng" algn="ctr">
-                      <a:noFill/>
-                    </a:lnB>
-                    <a:solidFill>
-                      <a:srgbClr val="1565C0"/>
-                    </a:solidFill>
-                  </a:tcPr>
-                </a:tc>
-              </a:tr>
-              <a:tr h="301752">
-                <a:tc>
-                  <a:txBody>
-                    <a:bodyPr/>
-                    <a:lstStyle/>
-                    <a:p>
-                      <a:pPr marL="0" indent="0">
-                        <a:buNone/>
-                      </a:pPr>
-                      <a:r>
-                        <a:rPr lang="en-US" sz="1000" dirty="0">
-                          <a:solidFill>
-                            <a:srgbClr val="1A237E"/>
-                          </a:solidFill>
-                          <a:latin typeface="Calibri" panose="020F0502020204030204" pitchFamily="34" charset="0"/>
-                          <a:ea typeface="Calibri" panose="020F0502020204030204" pitchFamily="34" charset="-122"/>
-                          <a:cs typeface="Calibri" panose="020F0502020204030204" pitchFamily="34" charset="-120"/>
-                        </a:rPr>
-                        <a:t>KSC LC-39A</a:t>
-                      </a:r>
-                      <a:endParaRPr lang="en-US" sz="1000" dirty="0">
-                        <a:latin typeface="Calibri" panose="020F0502020204030204" pitchFamily="34" charset="0"/>
-                        <a:ea typeface="Calibri" panose="020F0502020204030204" pitchFamily="34" charset="0"/>
-                        <a:cs typeface="Calibri" panose="020F0502020204030204" pitchFamily="34" charset="0"/>
-                      </a:endParaRPr>
-                    </a:p>
-                  </a:txBody>
-                  <a:tcPr>
-                    <a:lnL w="0" cap="flat" cmpd="sng" algn="ctr">
-                      <a:noFill/>
-                    </a:lnL>
-                    <a:lnR w="0" cap="flat" cmpd="sng" algn="ctr">
-                      <a:noFill/>
-                    </a:lnR>
-                    <a:lnT w="0" cap="flat" cmpd="sng" algn="ctr">
-                      <a:noFill/>
-                    </a:lnT>
-                    <a:lnB w="0" cap="flat" cmpd="sng" algn="ctr">
-                      <a:noFill/>
-                    </a:lnB>
-                    <a:solidFill>
-                      <a:srgbClr val="FFFFFF"/>
-                    </a:solidFill>
-                  </a:tcPr>
-                </a:tc>
-                <a:tc>
-                  <a:txBody>
-                    <a:bodyPr/>
-                    <a:lstStyle/>
-                    <a:p>
-                      <a:pPr marL="0" indent="0">
-                        <a:buNone/>
-                      </a:pPr>
-                      <a:r>
-                        <a:rPr lang="en-US" sz="1000" dirty="0">
-                          <a:solidFill>
-                            <a:srgbClr val="1A237E"/>
-                          </a:solidFill>
-                          <a:latin typeface="Calibri" panose="020F0502020204030204" pitchFamily="34" charset="0"/>
-                          <a:ea typeface="Calibri" panose="020F0502020204030204" pitchFamily="34" charset="-122"/>
-                          <a:cs typeface="Calibri" panose="020F0502020204030204" pitchFamily="34" charset="-120"/>
-                        </a:rPr>
-                        <a:t>Florida</a:t>
-                      </a:r>
-                      <a:endParaRPr lang="en-US" sz="1000" dirty="0">
-                        <a:latin typeface="Calibri" panose="020F0502020204030204" pitchFamily="34" charset="0"/>
-                        <a:ea typeface="Calibri" panose="020F0502020204030204" pitchFamily="34" charset="0"/>
-                        <a:cs typeface="Calibri" panose="020F0502020204030204" pitchFamily="34" charset="0"/>
-                      </a:endParaRPr>
-                    </a:p>
-                  </a:txBody>
-                  <a:tcPr>
-                    <a:lnL w="0" cap="flat" cmpd="sng" algn="ctr">
-                      <a:noFill/>
-                    </a:lnL>
-                    <a:lnR w="0" cap="flat" cmpd="sng" algn="ctr">
-                      <a:noFill/>
-                    </a:lnR>
-                    <a:lnT w="0" cap="flat" cmpd="sng" algn="ctr">
-                      <a:noFill/>
-                    </a:lnT>
-                    <a:lnB w="0" cap="flat" cmpd="sng" algn="ctr">
-                      <a:noFill/>
-                    </a:lnB>
-                    <a:solidFill>
-                      <a:srgbClr val="FFFFFF"/>
-                    </a:solidFill>
-                  </a:tcPr>
-                </a:tc>
-                <a:tc>
-                  <a:txBody>
-                    <a:bodyPr/>
-                    <a:lstStyle/>
-                    <a:p>
-                      <a:pPr marL="0" indent="0">
-                        <a:buNone/>
-                      </a:pPr>
-                      <a:r>
-                        <a:rPr lang="en-US" sz="1000" dirty="0">
-                          <a:solidFill>
-                            <a:srgbClr val="1A237E"/>
-                          </a:solidFill>
-                          <a:latin typeface="Calibri" panose="020F0502020204030204" pitchFamily="34" charset="0"/>
-                          <a:ea typeface="Calibri" panose="020F0502020204030204" pitchFamily="34" charset="-122"/>
-                          <a:cs typeface="Calibri" panose="020F0502020204030204" pitchFamily="34" charset="-120"/>
-                        </a:rPr>
-                        <a:t>27</a:t>
-                      </a:r>
-                      <a:endParaRPr lang="en-US" sz="1000" dirty="0">
-                        <a:latin typeface="Calibri" panose="020F0502020204030204" pitchFamily="34" charset="0"/>
-                        <a:ea typeface="Calibri" panose="020F0502020204030204" pitchFamily="34" charset="0"/>
-                        <a:cs typeface="Calibri" panose="020F0502020204030204" pitchFamily="34" charset="0"/>
-                      </a:endParaRPr>
-                    </a:p>
-                  </a:txBody>
-                  <a:tcPr>
-                    <a:lnL w="0" cap="flat" cmpd="sng" algn="ctr">
-                      <a:noFill/>
-                    </a:lnL>
-                    <a:lnR w="0" cap="flat" cmpd="sng" algn="ctr">
-                      <a:noFill/>
-                    </a:lnR>
-                    <a:lnT w="0" cap="flat" cmpd="sng" algn="ctr">
-                      <a:noFill/>
-                    </a:lnT>
-                    <a:lnB w="0" cap="flat" cmpd="sng" algn="ctr">
-                      <a:noFill/>
-                    </a:lnB>
-                    <a:solidFill>
-                      <a:srgbClr val="FFFFFF"/>
-                    </a:solidFill>
-                  </a:tcPr>
-                </a:tc>
-                <a:tc>
-                  <a:txBody>
-                    <a:bodyPr/>
-                    <a:lstStyle/>
-                    <a:p>
-                      <a:pPr marL="0" indent="0">
-                        <a:buNone/>
-                      </a:pPr>
-                      <a:r>
-                        <a:rPr lang="en-US" sz="1000" dirty="0">
-                          <a:solidFill>
-                            <a:srgbClr val="1A237E"/>
-                          </a:solidFill>
-                          <a:latin typeface="Calibri" panose="020F0502020204030204" pitchFamily="34" charset="0"/>
-                          <a:ea typeface="Calibri" panose="020F0502020204030204" pitchFamily="34" charset="-122"/>
-                          <a:cs typeface="Calibri" panose="020F0502020204030204" pitchFamily="34" charset="-120"/>
-                        </a:rPr>
-                        <a:t>77%</a:t>
-                      </a:r>
-                      <a:endParaRPr lang="en-US" sz="1000" dirty="0">
-                        <a:latin typeface="Calibri" panose="020F0502020204030204" pitchFamily="34" charset="0"/>
-                        <a:ea typeface="Calibri" panose="020F0502020204030204" pitchFamily="34" charset="0"/>
-                        <a:cs typeface="Calibri" panose="020F0502020204030204" pitchFamily="34" charset="0"/>
-                      </a:endParaRPr>
-                    </a:p>
-                  </a:txBody>
-                  <a:tcPr>
-                    <a:lnL w="0" cap="flat" cmpd="sng" algn="ctr">
-                      <a:noFill/>
-                    </a:lnL>
-                    <a:lnR w="0" cap="flat" cmpd="sng" algn="ctr">
-                      <a:noFill/>
-                    </a:lnR>
-                    <a:lnT w="0" cap="flat" cmpd="sng" algn="ctr">
-                      <a:noFill/>
-                    </a:lnT>
-                    <a:lnB w="0" cap="flat" cmpd="sng" algn="ctr">
-                      <a:noFill/>
-                    </a:lnB>
-                    <a:solidFill>
-                      <a:srgbClr val="FFFFFF"/>
-                    </a:solidFill>
-                  </a:tcPr>
-                </a:tc>
-              </a:tr>
-              <a:tr h="301752">
-                <a:tc>
-                  <a:txBody>
-                    <a:bodyPr/>
-                    <a:lstStyle/>
-                    <a:p>
-                      <a:pPr marL="0" indent="0">
-                        <a:buNone/>
-                      </a:pPr>
-                      <a:r>
-                        <a:rPr lang="en-US" sz="1000" dirty="0">
-                          <a:solidFill>
-                            <a:srgbClr val="1A237E"/>
-                          </a:solidFill>
-                          <a:latin typeface="Calibri" panose="020F0502020204030204" pitchFamily="34" charset="0"/>
-                          <a:ea typeface="Calibri" panose="020F0502020204030204" pitchFamily="34" charset="-122"/>
-                          <a:cs typeface="Calibri" panose="020F0502020204030204" pitchFamily="34" charset="-120"/>
-                        </a:rPr>
-                        <a:t>CCAFS LC-40</a:t>
-                      </a:r>
-                      <a:endParaRPr lang="en-US" sz="1000" dirty="0">
-                        <a:latin typeface="Calibri" panose="020F0502020204030204" pitchFamily="34" charset="0"/>
-                        <a:ea typeface="Calibri" panose="020F0502020204030204" pitchFamily="34" charset="0"/>
-                        <a:cs typeface="Calibri" panose="020F0502020204030204" pitchFamily="34" charset="0"/>
-                      </a:endParaRPr>
-                    </a:p>
-                  </a:txBody>
-                  <a:tcPr>
-                    <a:lnL w="0" cap="flat" cmpd="sng" algn="ctr">
-                      <a:noFill/>
-                    </a:lnL>
-                    <a:lnR w="0" cap="flat" cmpd="sng" algn="ctr">
-                      <a:noFill/>
-                    </a:lnR>
-                    <a:lnT w="0" cap="flat" cmpd="sng" algn="ctr">
-                      <a:noFill/>
-                    </a:lnT>
-                    <a:lnB w="0" cap="flat" cmpd="sng" algn="ctr">
-                      <a:noFill/>
-                    </a:lnB>
-                    <a:solidFill>
-                      <a:srgbClr val="F5F5F5"/>
-                    </a:solidFill>
-                  </a:tcPr>
-                </a:tc>
-                <a:tc>
-                  <a:txBody>
-                    <a:bodyPr/>
-                    <a:lstStyle/>
-                    <a:p>
-                      <a:pPr marL="0" indent="0">
-                        <a:buNone/>
-                      </a:pPr>
-                      <a:r>
-                        <a:rPr lang="en-US" sz="1000" dirty="0">
-                          <a:solidFill>
-                            <a:srgbClr val="1A237E"/>
-                          </a:solidFill>
-                          <a:latin typeface="Calibri" panose="020F0502020204030204" pitchFamily="34" charset="0"/>
-                          <a:ea typeface="Calibri" panose="020F0502020204030204" pitchFamily="34" charset="-122"/>
-                          <a:cs typeface="Calibri" panose="020F0502020204030204" pitchFamily="34" charset="-120"/>
-                        </a:rPr>
-                        <a:t>Florida</a:t>
-                      </a:r>
-                      <a:endParaRPr lang="en-US" sz="1000" dirty="0">
-                        <a:latin typeface="Calibri" panose="020F0502020204030204" pitchFamily="34" charset="0"/>
-                        <a:ea typeface="Calibri" panose="020F0502020204030204" pitchFamily="34" charset="0"/>
-                        <a:cs typeface="Calibri" panose="020F0502020204030204" pitchFamily="34" charset="0"/>
-                      </a:endParaRPr>
-                    </a:p>
-                  </a:txBody>
-                  <a:tcPr>
-                    <a:lnL w="0" cap="flat" cmpd="sng" algn="ctr">
-                      <a:noFill/>
-                    </a:lnL>
-                    <a:lnR w="0" cap="flat" cmpd="sng" algn="ctr">
-                      <a:noFill/>
-                    </a:lnR>
-                    <a:lnT w="0" cap="flat" cmpd="sng" algn="ctr">
-                      <a:noFill/>
-                    </a:lnT>
-                    <a:lnB w="0" cap="flat" cmpd="sng" algn="ctr">
-                      <a:noFill/>
-                    </a:lnB>
-                    <a:solidFill>
-                      <a:srgbClr val="F5F5F5"/>
-                    </a:solidFill>
-                  </a:tcPr>
-                </a:tc>
-                <a:tc>
-                  <a:txBody>
-                    <a:bodyPr/>
-                    <a:lstStyle/>
-                    <a:p>
-                      <a:pPr marL="0" indent="0">
-                        <a:buNone/>
-                      </a:pPr>
-                      <a:r>
-                        <a:rPr lang="en-US" sz="1000" dirty="0">
-                          <a:solidFill>
-                            <a:srgbClr val="1A237E"/>
-                          </a:solidFill>
-                          <a:latin typeface="Calibri" panose="020F0502020204030204" pitchFamily="34" charset="0"/>
-                          <a:ea typeface="Calibri" panose="020F0502020204030204" pitchFamily="34" charset="-122"/>
-                          <a:cs typeface="Calibri" panose="020F0502020204030204" pitchFamily="34" charset="-120"/>
-                        </a:rPr>
-                        <a:t>26</a:t>
-                      </a:r>
-                      <a:endParaRPr lang="en-US" sz="1000" dirty="0">
-                        <a:latin typeface="Calibri" panose="020F0502020204030204" pitchFamily="34" charset="0"/>
-                        <a:ea typeface="Calibri" panose="020F0502020204030204" pitchFamily="34" charset="0"/>
-                        <a:cs typeface="Calibri" panose="020F0502020204030204" pitchFamily="34" charset="0"/>
-                      </a:endParaRPr>
-                    </a:p>
-                  </a:txBody>
-                  <a:tcPr>
-                    <a:lnL w="0" cap="flat" cmpd="sng" algn="ctr">
-                      <a:noFill/>
-                    </a:lnL>
-                    <a:lnR w="0" cap="flat" cmpd="sng" algn="ctr">
-                      <a:noFill/>
-                    </a:lnR>
-                    <a:lnT w="0" cap="flat" cmpd="sng" algn="ctr">
-                      <a:noFill/>
-                    </a:lnT>
-                    <a:lnB w="0" cap="flat" cmpd="sng" algn="ctr">
-                      <a:noFill/>
-                    </a:lnB>
-                    <a:solidFill>
-                      <a:srgbClr val="F5F5F5"/>
-                    </a:solidFill>
-                  </a:tcPr>
-                </a:tc>
-                <a:tc>
-                  <a:txBody>
-                    <a:bodyPr/>
-                    <a:lstStyle/>
-                    <a:p>
-                      <a:pPr marL="0" indent="0">
-                        <a:buNone/>
-                      </a:pPr>
-                      <a:r>
-                        <a:rPr lang="en-US" sz="1000" dirty="0">
-                          <a:solidFill>
-                            <a:srgbClr val="1A237E"/>
-                          </a:solidFill>
-                          <a:latin typeface="Calibri" panose="020F0502020204030204" pitchFamily="34" charset="0"/>
-                          <a:ea typeface="Calibri" panose="020F0502020204030204" pitchFamily="34" charset="-122"/>
-                          <a:cs typeface="Calibri" panose="020F0502020204030204" pitchFamily="34" charset="-120"/>
-                        </a:rPr>
-                        <a:t>65%</a:t>
-                      </a:r>
-                      <a:endParaRPr lang="en-US" sz="1000" dirty="0">
-                        <a:latin typeface="Calibri" panose="020F0502020204030204" pitchFamily="34" charset="0"/>
-                        <a:ea typeface="Calibri" panose="020F0502020204030204" pitchFamily="34" charset="0"/>
-                        <a:cs typeface="Calibri" panose="020F0502020204030204" pitchFamily="34" charset="0"/>
-                      </a:endParaRPr>
-                    </a:p>
-                  </a:txBody>
-                  <a:tcPr>
-                    <a:lnL w="0" cap="flat" cmpd="sng" algn="ctr">
-                      <a:noFill/>
-                    </a:lnL>
-                    <a:lnR w="0" cap="flat" cmpd="sng" algn="ctr">
-                      <a:noFill/>
-                    </a:lnR>
-                    <a:lnT w="0" cap="flat" cmpd="sng" algn="ctr">
-                      <a:noFill/>
-                    </a:lnT>
-                    <a:lnB w="0" cap="flat" cmpd="sng" algn="ctr">
-                      <a:noFill/>
-                    </a:lnB>
-                    <a:solidFill>
-                      <a:srgbClr val="F5F5F5"/>
-                    </a:solidFill>
-                  </a:tcPr>
-                </a:tc>
-              </a:tr>
-              <a:tr h="301752">
-                <a:tc>
-                  <a:txBody>
-                    <a:bodyPr/>
-                    <a:lstStyle/>
-                    <a:p>
-                      <a:pPr marL="0" indent="0">
-                        <a:buNone/>
-                      </a:pPr>
-                      <a:r>
-                        <a:rPr lang="en-US" sz="1000" dirty="0">
-                          <a:solidFill>
-                            <a:srgbClr val="1A237E"/>
-                          </a:solidFill>
-                          <a:latin typeface="Calibri" panose="020F0502020204030204" pitchFamily="34" charset="0"/>
-                          <a:ea typeface="Calibri" panose="020F0502020204030204" pitchFamily="34" charset="-122"/>
-                          <a:cs typeface="Calibri" panose="020F0502020204030204" pitchFamily="34" charset="-120"/>
-                        </a:rPr>
-                        <a:t>CCAFS SLC-40</a:t>
-                      </a:r>
-                      <a:endParaRPr lang="en-US" sz="1000" dirty="0">
-                        <a:latin typeface="Calibri" panose="020F0502020204030204" pitchFamily="34" charset="0"/>
-                        <a:ea typeface="Calibri" panose="020F0502020204030204" pitchFamily="34" charset="0"/>
-                        <a:cs typeface="Calibri" panose="020F0502020204030204" pitchFamily="34" charset="0"/>
-                      </a:endParaRPr>
-                    </a:p>
-                  </a:txBody>
-                  <a:tcPr>
-                    <a:lnL w="0" cap="flat" cmpd="sng" algn="ctr">
-                      <a:noFill/>
-                    </a:lnL>
-                    <a:lnR w="0" cap="flat" cmpd="sng" algn="ctr">
-                      <a:noFill/>
-                    </a:lnR>
-                    <a:lnT w="0" cap="flat" cmpd="sng" algn="ctr">
-                      <a:noFill/>
-                    </a:lnT>
-                    <a:lnB w="0" cap="flat" cmpd="sng" algn="ctr">
-                      <a:noFill/>
-                    </a:lnB>
-                    <a:solidFill>
-                      <a:srgbClr val="FFFFFF"/>
-                    </a:solidFill>
-                  </a:tcPr>
-                </a:tc>
-                <a:tc>
-                  <a:txBody>
-                    <a:bodyPr/>
-                    <a:lstStyle/>
-                    <a:p>
-                      <a:pPr marL="0" indent="0">
-                        <a:buNone/>
-                      </a:pPr>
-                      <a:r>
-                        <a:rPr lang="en-US" sz="1000" dirty="0">
-                          <a:solidFill>
-                            <a:srgbClr val="1A237E"/>
-                          </a:solidFill>
-                          <a:latin typeface="Calibri" panose="020F0502020204030204" pitchFamily="34" charset="0"/>
-                          <a:ea typeface="Calibri" panose="020F0502020204030204" pitchFamily="34" charset="-122"/>
-                          <a:cs typeface="Calibri" panose="020F0502020204030204" pitchFamily="34" charset="-120"/>
-                        </a:rPr>
-                        <a:t>Florida</a:t>
-                      </a:r>
-                      <a:endParaRPr lang="en-US" sz="1000" dirty="0">
-                        <a:latin typeface="Calibri" panose="020F0502020204030204" pitchFamily="34" charset="0"/>
-                        <a:ea typeface="Calibri" panose="020F0502020204030204" pitchFamily="34" charset="0"/>
-                        <a:cs typeface="Calibri" panose="020F0502020204030204" pitchFamily="34" charset="0"/>
-                      </a:endParaRPr>
-                    </a:p>
-                  </a:txBody>
-                  <a:tcPr>
-                    <a:lnL w="0" cap="flat" cmpd="sng" algn="ctr">
-                      <a:noFill/>
-                    </a:lnL>
-                    <a:lnR w="0" cap="flat" cmpd="sng" algn="ctr">
-                      <a:noFill/>
-                    </a:lnR>
-                    <a:lnT w="0" cap="flat" cmpd="sng" algn="ctr">
-                      <a:noFill/>
-                    </a:lnT>
-                    <a:lnB w="0" cap="flat" cmpd="sng" algn="ctr">
-                      <a:noFill/>
-                    </a:lnB>
-                    <a:solidFill>
-                      <a:srgbClr val="FFFFFF"/>
-                    </a:solidFill>
-                  </a:tcPr>
-                </a:tc>
-                <a:tc>
-                  <a:txBody>
-                    <a:bodyPr/>
-                    <a:lstStyle/>
-                    <a:p>
-                      <a:pPr marL="0" indent="0">
-                        <a:buNone/>
-                      </a:pPr>
-                      <a:r>
-                        <a:rPr lang="en-US" sz="1000" dirty="0">
-                          <a:solidFill>
-                            <a:srgbClr val="1A237E"/>
-                          </a:solidFill>
-                          <a:latin typeface="Calibri" panose="020F0502020204030204" pitchFamily="34" charset="0"/>
-                          <a:ea typeface="Calibri" panose="020F0502020204030204" pitchFamily="34" charset="-122"/>
-                          <a:cs typeface="Calibri" panose="020F0502020204030204" pitchFamily="34" charset="-120"/>
-                        </a:rPr>
-                        <a:t>22</a:t>
-                      </a:r>
-                      <a:endParaRPr lang="en-US" sz="1000" dirty="0">
-                        <a:latin typeface="Calibri" panose="020F0502020204030204" pitchFamily="34" charset="0"/>
-                        <a:ea typeface="Calibri" panose="020F0502020204030204" pitchFamily="34" charset="0"/>
-                        <a:cs typeface="Calibri" panose="020F0502020204030204" pitchFamily="34" charset="0"/>
-                      </a:endParaRPr>
-                    </a:p>
-                  </a:txBody>
-                  <a:tcPr>
-                    <a:lnL w="0" cap="flat" cmpd="sng" algn="ctr">
-                      <a:noFill/>
-                    </a:lnL>
-                    <a:lnR w="0" cap="flat" cmpd="sng" algn="ctr">
-                      <a:noFill/>
-                    </a:lnR>
-                    <a:lnT w="0" cap="flat" cmpd="sng" algn="ctr">
-                      <a:noFill/>
-                    </a:lnT>
-                    <a:lnB w="0" cap="flat" cmpd="sng" algn="ctr">
-                      <a:noFill/>
-                    </a:lnB>
-                    <a:solidFill>
-                      <a:srgbClr val="FFFFFF"/>
-                    </a:solidFill>
-                  </a:tcPr>
-                </a:tc>
-                <a:tc>
-                  <a:txBody>
-                    <a:bodyPr/>
-                    <a:lstStyle/>
-                    <a:p>
-                      <a:pPr marL="0" indent="0">
-                        <a:buNone/>
-                      </a:pPr>
-                      <a:r>
-                        <a:rPr lang="en-US" sz="1000" dirty="0">
-                          <a:solidFill>
-                            <a:srgbClr val="1A237E"/>
-                          </a:solidFill>
-                          <a:latin typeface="Calibri" panose="020F0502020204030204" pitchFamily="34" charset="0"/>
-                          <a:ea typeface="Calibri" panose="020F0502020204030204" pitchFamily="34" charset="-122"/>
-                          <a:cs typeface="Calibri" panose="020F0502020204030204" pitchFamily="34" charset="-120"/>
-                        </a:rPr>
-                        <a:t>59%</a:t>
-                      </a:r>
-                      <a:endParaRPr lang="en-US" sz="1000" dirty="0">
-                        <a:latin typeface="Calibri" panose="020F0502020204030204" pitchFamily="34" charset="0"/>
-                        <a:ea typeface="Calibri" panose="020F0502020204030204" pitchFamily="34" charset="0"/>
-                        <a:cs typeface="Calibri" panose="020F0502020204030204" pitchFamily="34" charset="0"/>
-                      </a:endParaRPr>
-                    </a:p>
-                  </a:txBody>
-                  <a:tcPr>
-                    <a:lnL w="0" cap="flat" cmpd="sng" algn="ctr">
-                      <a:noFill/>
-                    </a:lnL>
-                    <a:lnR w="0" cap="flat" cmpd="sng" algn="ctr">
-                      <a:noFill/>
-                    </a:lnR>
-                    <a:lnT w="0" cap="flat" cmpd="sng" algn="ctr">
-                      <a:noFill/>
-                    </a:lnT>
-                    <a:lnB w="0" cap="flat" cmpd="sng" algn="ctr">
-                      <a:noFill/>
-                    </a:lnB>
-                    <a:solidFill>
-                      <a:srgbClr val="FFFFFF"/>
-                    </a:solidFill>
-                  </a:tcPr>
-                </a:tc>
-              </a:tr>
-              <a:tr h="301752">
-                <a:tc>
-                  <a:txBody>
-                    <a:bodyPr/>
-                    <a:lstStyle/>
-                    <a:p>
-                      <a:pPr marL="0" indent="0">
-                        <a:buNone/>
-                      </a:pPr>
-                      <a:r>
-                        <a:rPr lang="en-US" sz="1000" dirty="0">
-                          <a:solidFill>
-                            <a:srgbClr val="1A237E"/>
-                          </a:solidFill>
-                          <a:latin typeface="Calibri" panose="020F0502020204030204" pitchFamily="34" charset="0"/>
-                          <a:ea typeface="Calibri" panose="020F0502020204030204" pitchFamily="34" charset="-122"/>
-                          <a:cs typeface="Calibri" panose="020F0502020204030204" pitchFamily="34" charset="-120"/>
-                        </a:rPr>
-                        <a:t>VAFB SLC-4E</a:t>
-                      </a:r>
-                      <a:endParaRPr lang="en-US" sz="1000" dirty="0">
-                        <a:latin typeface="Calibri" panose="020F0502020204030204" pitchFamily="34" charset="0"/>
-                        <a:ea typeface="Calibri" panose="020F0502020204030204" pitchFamily="34" charset="0"/>
-                        <a:cs typeface="Calibri" panose="020F0502020204030204" pitchFamily="34" charset="0"/>
-                      </a:endParaRPr>
-                    </a:p>
-                  </a:txBody>
-                  <a:tcPr>
-                    <a:lnL w="0" cap="flat" cmpd="sng" algn="ctr">
-                      <a:noFill/>
-                    </a:lnL>
-                    <a:lnR w="0" cap="flat" cmpd="sng" algn="ctr">
-                      <a:noFill/>
-                    </a:lnR>
-                    <a:lnT w="0" cap="flat" cmpd="sng" algn="ctr">
-                      <a:noFill/>
-                    </a:lnT>
-                    <a:lnB w="0" cap="flat" cmpd="sng" algn="ctr">
-                      <a:noFill/>
-                    </a:lnB>
-                    <a:solidFill>
-                      <a:srgbClr val="F5F5F5"/>
-                    </a:solidFill>
-                  </a:tcPr>
-                </a:tc>
-                <a:tc>
-                  <a:txBody>
-                    <a:bodyPr/>
-                    <a:lstStyle/>
-                    <a:p>
-                      <a:pPr marL="0" indent="0">
-                        <a:buNone/>
-                      </a:pPr>
-                      <a:r>
-                        <a:rPr lang="en-US" sz="1000" dirty="0">
-                          <a:solidFill>
-                            <a:srgbClr val="1A237E"/>
-                          </a:solidFill>
-                          <a:latin typeface="Calibri" panose="020F0502020204030204" pitchFamily="34" charset="0"/>
-                          <a:ea typeface="Calibri" panose="020F0502020204030204" pitchFamily="34" charset="-122"/>
-                          <a:cs typeface="Calibri" panose="020F0502020204030204" pitchFamily="34" charset="-120"/>
-                        </a:rPr>
-                        <a:t>California</a:t>
-                      </a:r>
-                      <a:endParaRPr lang="en-US" sz="1000" dirty="0">
-                        <a:latin typeface="Calibri" panose="020F0502020204030204" pitchFamily="34" charset="0"/>
-                        <a:ea typeface="Calibri" panose="020F0502020204030204" pitchFamily="34" charset="0"/>
-                        <a:cs typeface="Calibri" panose="020F0502020204030204" pitchFamily="34" charset="0"/>
-                      </a:endParaRPr>
-                    </a:p>
-                  </a:txBody>
-                  <a:tcPr>
-                    <a:lnL w="0" cap="flat" cmpd="sng" algn="ctr">
-                      <a:noFill/>
-                    </a:lnL>
-                    <a:lnR w="0" cap="flat" cmpd="sng" algn="ctr">
-                      <a:noFill/>
-                    </a:lnR>
-                    <a:lnT w="0" cap="flat" cmpd="sng" algn="ctr">
-                      <a:noFill/>
-                    </a:lnT>
-                    <a:lnB w="0" cap="flat" cmpd="sng" algn="ctr">
-                      <a:noFill/>
-                    </a:lnB>
-                    <a:solidFill>
-                      <a:srgbClr val="F5F5F5"/>
-                    </a:solidFill>
-                  </a:tcPr>
-                </a:tc>
-                <a:tc>
-                  <a:txBody>
-                    <a:bodyPr/>
-                    <a:lstStyle/>
-                    <a:p>
-                      <a:pPr marL="0" indent="0">
-                        <a:buNone/>
-                      </a:pPr>
-                      <a:r>
-                        <a:rPr lang="en-US" sz="1000" dirty="0">
-                          <a:solidFill>
-                            <a:srgbClr val="1A237E"/>
-                          </a:solidFill>
-                          <a:latin typeface="Calibri" panose="020F0502020204030204" pitchFamily="34" charset="0"/>
-                          <a:ea typeface="Calibri" panose="020F0502020204030204" pitchFamily="34" charset="-122"/>
-                          <a:cs typeface="Calibri" panose="020F0502020204030204" pitchFamily="34" charset="-120"/>
-                        </a:rPr>
-                        <a:t>13</a:t>
-                      </a:r>
-                      <a:endParaRPr lang="en-US" sz="1000" dirty="0">
-                        <a:latin typeface="Calibri" panose="020F0502020204030204" pitchFamily="34" charset="0"/>
-                        <a:ea typeface="Calibri" panose="020F0502020204030204" pitchFamily="34" charset="0"/>
-                        <a:cs typeface="Calibri" panose="020F0502020204030204" pitchFamily="34" charset="0"/>
-                      </a:endParaRPr>
-                    </a:p>
-                  </a:txBody>
-                  <a:tcPr>
-                    <a:lnL w="0" cap="flat" cmpd="sng" algn="ctr">
-                      <a:noFill/>
-                    </a:lnL>
-                    <a:lnR w="0" cap="flat" cmpd="sng" algn="ctr">
-                      <a:noFill/>
-                    </a:lnR>
-                    <a:lnT w="0" cap="flat" cmpd="sng" algn="ctr">
-                      <a:noFill/>
-                    </a:lnT>
-                    <a:lnB w="0" cap="flat" cmpd="sng" algn="ctr">
-                      <a:noFill/>
-                    </a:lnB>
-                    <a:solidFill>
-                      <a:srgbClr val="F5F5F5"/>
-                    </a:solidFill>
-                  </a:tcPr>
-                </a:tc>
-                <a:tc>
-                  <a:txBody>
-                    <a:bodyPr/>
-                    <a:lstStyle/>
-                    <a:p>
-                      <a:pPr marL="0" indent="0">
-                        <a:buNone/>
-                      </a:pPr>
-                      <a:r>
-                        <a:rPr lang="en-US" sz="1000" dirty="0">
-                          <a:solidFill>
-                            <a:srgbClr val="1A237E"/>
-                          </a:solidFill>
-                          <a:latin typeface="Calibri" panose="020F0502020204030204" pitchFamily="34" charset="0"/>
-                          <a:ea typeface="Calibri" panose="020F0502020204030204" pitchFamily="34" charset="-122"/>
-                          <a:cs typeface="Calibri" panose="020F0502020204030204" pitchFamily="34" charset="-120"/>
-                        </a:rPr>
-                        <a:t>62%</a:t>
-                      </a:r>
-                      <a:endParaRPr lang="en-US" sz="1000" dirty="0">
-                        <a:latin typeface="Calibri" panose="020F0502020204030204" pitchFamily="34" charset="0"/>
-                        <a:ea typeface="Calibri" panose="020F0502020204030204" pitchFamily="34" charset="0"/>
-                        <a:cs typeface="Calibri" panose="020F0502020204030204" pitchFamily="34" charset="0"/>
-                      </a:endParaRPr>
-                    </a:p>
-                  </a:txBody>
-                  <a:tcPr>
-                    <a:lnL w="0" cap="flat" cmpd="sng" algn="ctr">
-                      <a:noFill/>
-                    </a:lnL>
-                    <a:lnR w="0" cap="flat" cmpd="sng" algn="ctr">
-                      <a:noFill/>
-                    </a:lnR>
-                    <a:lnT w="0" cap="flat" cmpd="sng" algn="ctr">
-                      <a:noFill/>
-                    </a:lnT>
-                    <a:lnB w="0" cap="flat" cmpd="sng" algn="ctr">
-                      <a:noFill/>
-                    </a:lnB>
-                    <a:solidFill>
-                      <a:srgbClr val="F5F5F5"/>
-                    </a:solidFill>
-                  </a:tcPr>
-                </a:tc>
-              </a:tr>
-            </a:tbl>
-          </a:graphicData>
-        </a:graphic>
-      </p:graphicFrame>
-      <p:sp>
-        <p:nvSpPr>
-          <p:cNvPr id="8" name="Text 5"/>
-          <p:cNvSpPr/>
-          <p:nvPr/>
-        </p:nvSpPr>
-        <p:spPr>
-          <a:xfrm>
-            <a:off x="365760" y="3063240"/>
-            <a:ext cx="4754880" cy="256032"/>
-          </a:xfrm>
-          <a:prstGeom prst="rect">
-            <a:avLst/>
-          </a:prstGeom>
-          <a:noFill/>
-        </p:spPr>
-        <p:txBody>
-          <a:bodyPr wrap="square" lIns="0" tIns="0" rIns="0" bIns="0" rtlCol="0" anchor="ctr"/>
-          <a:lstStyle/>
-          <a:p>
-            <a:pPr marL="0" indent="0">
-              <a:buNone/>
-            </a:pPr>
-            <a:r>
-              <a:rPr lang="en-US" sz="1300" b="1" dirty="0">
-                <a:solidFill>
-                  <a:srgbClr val="1565C0"/>
-                </a:solidFill>
-                <a:latin typeface="Calibri" panose="020F0502020204030204" pitchFamily="34" charset="0"/>
-                <a:ea typeface="Calibri" panose="020F0502020204030204" pitchFamily="34" charset="-122"/>
-                <a:cs typeface="Calibri" panose="020F0502020204030204" pitchFamily="34" charset="-120"/>
-              </a:rPr>
-              <a:t>Proximity Analysis Findings</a:t>
-            </a:r>
-            <a:endParaRPr lang="en-US" sz="1300" dirty="0"/>
-          </a:p>
-        </p:txBody>
-      </p:sp>
-      <p:sp>
-        <p:nvSpPr>
-          <p:cNvPr id="9" name="Text 6"/>
-          <p:cNvSpPr/>
-          <p:nvPr/>
-        </p:nvSpPr>
-        <p:spPr>
-          <a:xfrm>
-            <a:off x="365760" y="3337560"/>
-            <a:ext cx="4754880" cy="1371600"/>
-          </a:xfrm>
-          <a:prstGeom prst="rect">
-            <a:avLst/>
-          </a:prstGeom>
-          <a:noFill/>
-        </p:spPr>
-        <p:txBody>
-          <a:bodyPr wrap="square" lIns="0" tIns="0" rIns="0" bIns="0" rtlCol="0" anchor="ctr"/>
-          <a:lstStyle/>
-          <a:p>
-            <a:pPr marL="127000" indent="-127000">
-              <a:buSzPct val="100000"/>
-              <a:buChar char="•"/>
-            </a:pPr>
-            <a:r>
-              <a:rPr lang="en-US" sz="1050" dirty="0">
-                <a:solidFill>
-                  <a:srgbClr val="1A237E"/>
-                </a:solidFill>
-                <a:latin typeface="Calibri" panose="020F0502020204030204" pitchFamily="34" charset="0"/>
-                <a:ea typeface="Calibri" panose="020F0502020204030204" pitchFamily="34" charset="-122"/>
-                <a:cs typeface="Calibri" panose="020F0502020204030204" pitchFamily="34" charset="-120"/>
-              </a:rPr>
-              <a:t>All sites located within 20 km of coastline (ocean proximity for safety)</a:t>
-            </a:r>
-            <a:endParaRPr lang="en-US" sz="1050" dirty="0"/>
-          </a:p>
-          <a:p>
-            <a:pPr marL="127000" indent="-127000">
-              <a:buSzPct val="100000"/>
-              <a:buChar char="•"/>
-            </a:pPr>
-            <a:r>
-              <a:rPr lang="en-US" sz="1050" dirty="0">
-                <a:solidFill>
-                  <a:srgbClr val="1A237E"/>
-                </a:solidFill>
-                <a:latin typeface="Calibri" panose="020F0502020204030204" pitchFamily="34" charset="0"/>
-                <a:ea typeface="Calibri" panose="020F0502020204030204" pitchFamily="34" charset="-122"/>
-                <a:cs typeface="Calibri" panose="020F0502020204030204" pitchFamily="34" charset="-120"/>
-              </a:rPr>
-              <a:t>Sites 50–100 km from populated cities (safety buffers maintained)</a:t>
-            </a:r>
-            <a:endParaRPr lang="en-US" sz="1050" dirty="0"/>
-          </a:p>
-          <a:p>
-            <a:pPr marL="127000" indent="-127000">
-              <a:buSzPct val="100000"/>
-              <a:buChar char="•"/>
-            </a:pPr>
-            <a:r>
-              <a:rPr lang="en-US" sz="1050" dirty="0">
-                <a:solidFill>
-                  <a:srgbClr val="1A237E"/>
-                </a:solidFill>
-                <a:latin typeface="Calibri" panose="020F0502020204030204" pitchFamily="34" charset="0"/>
-                <a:ea typeface="Calibri" panose="020F0502020204030204" pitchFamily="34" charset="-122"/>
-                <a:cs typeface="Calibri" panose="020F0502020204030204" pitchFamily="34" charset="-120"/>
-              </a:rPr>
-              <a:t>KSC closest to railway infrastructure — logistics advantage</a:t>
-            </a:r>
-            <a:endParaRPr lang="en-US" sz="1050" dirty="0"/>
-          </a:p>
-          <a:p>
-            <a:pPr marL="127000" indent="-127000">
-              <a:buSzPct val="100000"/>
-              <a:buChar char="•"/>
-            </a:pPr>
-            <a:r>
-              <a:rPr lang="en-US" sz="1050" dirty="0">
-                <a:solidFill>
-                  <a:srgbClr val="1A237E"/>
-                </a:solidFill>
-                <a:latin typeface="Calibri" panose="020F0502020204030204" pitchFamily="34" charset="0"/>
-                <a:ea typeface="Calibri" panose="020F0502020204030204" pitchFamily="34" charset="-122"/>
-                <a:cs typeface="Calibri" panose="020F0502020204030204" pitchFamily="34" charset="-120"/>
-              </a:rPr>
-              <a:t>VAFB optimized for polar/SSO orbits (Pacific launch corridor)</a:t>
-            </a:r>
-            <a:endParaRPr lang="en-US" sz="1050" dirty="0"/>
-          </a:p>
-        </p:txBody>
-      </p:sp>
-      <p:sp>
-        <p:nvSpPr>
-          <p:cNvPr id="7" name="Shape 7"/>
-          <p:cNvSpPr/>
-          <p:nvPr/>
-        </p:nvSpPr>
-        <p:spPr>
-          <a:xfrm>
-            <a:off x="5303520" y="1170432"/>
-            <a:ext cx="3566160" cy="3566160"/>
-          </a:xfrm>
-          <a:prstGeom prst="rect">
-            <a:avLst/>
-          </a:prstGeom>
-          <a:solidFill>
-            <a:srgbClr val="0D1B2A"/>
-          </a:solidFill>
-          <a:ln w="12700">
-            <a:solidFill>
-              <a:srgbClr val="00BCD4"/>
-            </a:solidFill>
-            <a:prstDash val="solid"/>
-          </a:ln>
-        </p:spPr>
-      </p:sp>
-      <p:sp>
-        <p:nvSpPr>
-          <p:cNvPr id="11" name="Text 8"/>
-          <p:cNvSpPr/>
-          <p:nvPr/>
-        </p:nvSpPr>
-        <p:spPr>
-          <a:xfrm>
-            <a:off x="5440680" y="1261872"/>
-            <a:ext cx="3291840" cy="256032"/>
-          </a:xfrm>
-          <a:prstGeom prst="rect">
-            <a:avLst/>
-          </a:prstGeom>
-          <a:noFill/>
-        </p:spPr>
-        <p:txBody>
-          <a:bodyPr wrap="square" lIns="0" tIns="0" rIns="0" bIns="0" rtlCol="0" anchor="ctr"/>
-          <a:lstStyle/>
-          <a:p>
-            <a:pPr marL="0" indent="0">
-              <a:buNone/>
-            </a:pPr>
-            <a:r>
-              <a:rPr lang="en-US" sz="1300" b="1" dirty="0">
-                <a:solidFill>
-                  <a:srgbClr val="00BCD4"/>
-                </a:solidFill>
-                <a:latin typeface="Calibri" panose="020F0502020204030204" pitchFamily="34" charset="0"/>
-                <a:ea typeface="Calibri" panose="020F0502020204030204" pitchFamily="34" charset="-122"/>
-                <a:cs typeface="Calibri" panose="020F0502020204030204" pitchFamily="34" charset="-120"/>
-              </a:rPr>
-              <a:t>Folium Map Features</a:t>
-            </a:r>
-            <a:endParaRPr lang="en-US" sz="1300" dirty="0"/>
-          </a:p>
-        </p:txBody>
-      </p:sp>
-      <p:sp>
-        <p:nvSpPr>
-          <p:cNvPr id="12" name="Text 9"/>
-          <p:cNvSpPr/>
-          <p:nvPr/>
-        </p:nvSpPr>
-        <p:spPr>
-          <a:xfrm>
-            <a:off x="5440680" y="1600200"/>
-            <a:ext cx="3291840" cy="384048"/>
-          </a:xfrm>
-          <a:prstGeom prst="rect">
-            <a:avLst/>
-          </a:prstGeom>
-          <a:noFill/>
-        </p:spPr>
-        <p:txBody>
-          <a:bodyPr wrap="square" lIns="0" tIns="0" rIns="0" bIns="0" rtlCol="0" anchor="ctr"/>
-          <a:lstStyle/>
-          <a:p>
-            <a:pPr marL="0" indent="0">
-              <a:buNone/>
-            </a:pPr>
-            <a:r>
-              <a:rPr lang="en-US" sz="1000" dirty="0">
-                <a:solidFill>
-                  <a:srgbClr val="FFFFFF"/>
-                </a:solidFill>
-                <a:latin typeface="Calibri" panose="020F0502020204030204" pitchFamily="34" charset="0"/>
-                <a:ea typeface="Calibri" panose="020F0502020204030204" pitchFamily="34" charset="-122"/>
-                <a:cs typeface="Calibri" panose="020F0502020204030204" pitchFamily="34" charset="-120"/>
-              </a:rPr>
-              <a:t>🟢 Green markers = successful landings</a:t>
-            </a:r>
-            <a:endParaRPr lang="en-US" sz="1000" dirty="0"/>
-          </a:p>
-        </p:txBody>
-      </p:sp>
-      <p:sp>
-        <p:nvSpPr>
-          <p:cNvPr id="13" name="Text 10"/>
-          <p:cNvSpPr/>
-          <p:nvPr/>
-        </p:nvSpPr>
-        <p:spPr>
-          <a:xfrm>
-            <a:off x="5440680" y="2057400"/>
-            <a:ext cx="3291840" cy="384048"/>
-          </a:xfrm>
-          <a:prstGeom prst="rect">
-            <a:avLst/>
-          </a:prstGeom>
-          <a:noFill/>
-        </p:spPr>
-        <p:txBody>
-          <a:bodyPr wrap="square" lIns="0" tIns="0" rIns="0" bIns="0" rtlCol="0" anchor="ctr"/>
-          <a:lstStyle/>
-          <a:p>
-            <a:pPr marL="0" indent="0">
-              <a:buNone/>
-            </a:pPr>
-            <a:r>
-              <a:rPr lang="en-US" sz="1000" dirty="0">
-                <a:solidFill>
-                  <a:srgbClr val="FFFFFF"/>
-                </a:solidFill>
-                <a:latin typeface="Calibri" panose="020F0502020204030204" pitchFamily="34" charset="0"/>
-                <a:ea typeface="Calibri" panose="020F0502020204030204" pitchFamily="34" charset="-122"/>
-                <a:cs typeface="Calibri" panose="020F0502020204030204" pitchFamily="34" charset="-120"/>
-              </a:rPr>
-              <a:t>🔴 Red markers = failed landings</a:t>
-            </a:r>
-            <a:endParaRPr lang="en-US" sz="1000" dirty="0"/>
-          </a:p>
-        </p:txBody>
-      </p:sp>
-      <p:sp>
-        <p:nvSpPr>
-          <p:cNvPr id="14" name="Text 11"/>
-          <p:cNvSpPr/>
-          <p:nvPr/>
-        </p:nvSpPr>
-        <p:spPr>
-          <a:xfrm>
-            <a:off x="5440680" y="2514600"/>
-            <a:ext cx="3291840" cy="384048"/>
-          </a:xfrm>
-          <a:prstGeom prst="rect">
-            <a:avLst/>
-          </a:prstGeom>
-          <a:noFill/>
-        </p:spPr>
-        <p:txBody>
-          <a:bodyPr wrap="square" lIns="0" tIns="0" rIns="0" bIns="0" rtlCol="0" anchor="ctr"/>
-          <a:lstStyle/>
-          <a:p>
-            <a:pPr marL="0" indent="0">
-              <a:buNone/>
-            </a:pPr>
-            <a:r>
-              <a:rPr lang="en-US" sz="1000" dirty="0">
-                <a:solidFill>
-                  <a:srgbClr val="FFFFFF"/>
-                </a:solidFill>
-                <a:latin typeface="Calibri" panose="020F0502020204030204" pitchFamily="34" charset="0"/>
-                <a:ea typeface="Calibri" panose="020F0502020204030204" pitchFamily="34" charset="-122"/>
-                <a:cs typeface="Calibri" panose="020F0502020204030204" pitchFamily="34" charset="-120"/>
-              </a:rPr>
-              <a:t>⭕ Circle markers = launch sites with pop-up details</a:t>
-            </a:r>
-            <a:endParaRPr lang="en-US" sz="1000" dirty="0"/>
-          </a:p>
-        </p:txBody>
-      </p:sp>
-      <p:sp>
-        <p:nvSpPr>
-          <p:cNvPr id="15" name="Text 12"/>
-          <p:cNvSpPr/>
-          <p:nvPr/>
-        </p:nvSpPr>
-        <p:spPr>
-          <a:xfrm>
-            <a:off x="5440680" y="2971800"/>
-            <a:ext cx="3291840" cy="384048"/>
-          </a:xfrm>
-          <a:prstGeom prst="rect">
-            <a:avLst/>
-          </a:prstGeom>
-          <a:noFill/>
-        </p:spPr>
-        <p:txBody>
-          <a:bodyPr wrap="square" lIns="0" tIns="0" rIns="0" bIns="0" rtlCol="0" anchor="ctr"/>
-          <a:lstStyle/>
-          <a:p>
-            <a:pPr marL="0" indent="0">
-              <a:buNone/>
-            </a:pPr>
-            <a:r>
-              <a:rPr lang="en-US" sz="1000" dirty="0">
-                <a:solidFill>
-                  <a:srgbClr val="FFFFFF"/>
-                </a:solidFill>
-                <a:latin typeface="Calibri" panose="020F0502020204030204" pitchFamily="34" charset="0"/>
-                <a:ea typeface="Calibri" panose="020F0502020204030204" pitchFamily="34" charset="-122"/>
-                <a:cs typeface="Calibri" panose="020F0502020204030204" pitchFamily="34" charset="-120"/>
-              </a:rPr>
-              <a:t>📏 Distance lines — coastline, city, railways</a:t>
-            </a:r>
-            <a:endParaRPr lang="en-US" sz="1000" dirty="0"/>
-          </a:p>
-        </p:txBody>
-      </p:sp>
-      <p:sp>
-        <p:nvSpPr>
-          <p:cNvPr id="16" name="Text 13"/>
-          <p:cNvSpPr/>
-          <p:nvPr/>
-        </p:nvSpPr>
-        <p:spPr>
-          <a:xfrm>
-            <a:off x="5440680" y="3429000"/>
-            <a:ext cx="3291840" cy="384048"/>
-          </a:xfrm>
-          <a:prstGeom prst="rect">
-            <a:avLst/>
-          </a:prstGeom>
-          <a:noFill/>
-        </p:spPr>
-        <p:txBody>
-          <a:bodyPr wrap="square" lIns="0" tIns="0" rIns="0" bIns="0" rtlCol="0" anchor="ctr"/>
-          <a:lstStyle/>
-          <a:p>
-            <a:pPr marL="0" indent="0">
-              <a:buNone/>
-            </a:pPr>
-            <a:r>
-              <a:rPr lang="en-US" sz="1000" dirty="0">
-                <a:solidFill>
-                  <a:srgbClr val="FFFFFF"/>
-                </a:solidFill>
-                <a:latin typeface="Calibri" panose="020F0502020204030204" pitchFamily="34" charset="0"/>
-                <a:ea typeface="Calibri" panose="020F0502020204030204" pitchFamily="34" charset="-122"/>
-                <a:cs typeface="Calibri" panose="020F0502020204030204" pitchFamily="34" charset="-120"/>
-              </a:rPr>
-              <a:t>🗺️ Cluster view for dense launch areas</a:t>
-            </a:r>
-            <a:endParaRPr lang="en-US" sz="1000" dirty="0"/>
-          </a:p>
-        </p:txBody>
-      </p:sp>
-      <p:sp>
-        <p:nvSpPr>
-          <p:cNvPr id="17" name="Text 14"/>
-          <p:cNvSpPr/>
-          <p:nvPr/>
-        </p:nvSpPr>
-        <p:spPr>
-          <a:xfrm>
-            <a:off x="5440680" y="3886200"/>
-            <a:ext cx="3291840" cy="384048"/>
-          </a:xfrm>
-          <a:prstGeom prst="rect">
-            <a:avLst/>
-          </a:prstGeom>
-          <a:noFill/>
-        </p:spPr>
-        <p:txBody>
-          <a:bodyPr wrap="square" lIns="0" tIns="0" rIns="0" bIns="0" rtlCol="0" anchor="ctr"/>
-          <a:lstStyle/>
-          <a:p>
-            <a:pPr marL="0" indent="0">
-              <a:buNone/>
-            </a:pPr>
-            <a:r>
-              <a:rPr lang="en-US" sz="1000" dirty="0">
-                <a:solidFill>
-                  <a:srgbClr val="FFFFFF"/>
-                </a:solidFill>
-                <a:latin typeface="Calibri" panose="020F0502020204030204" pitchFamily="34" charset="0"/>
-                <a:ea typeface="Calibri" panose="020F0502020204030204" pitchFamily="34" charset="-122"/>
-                <a:cs typeface="Calibri" panose="020F0502020204030204" pitchFamily="34" charset="-120"/>
-              </a:rPr>
-              <a:t>Filterable by mission outcome for pattern analysis</a:t>
-            </a:r>
-            <a:endParaRPr lang="en-US" sz="1000" dirty="0"/>
-          </a:p>
-        </p:txBody>
-      </p:sp>
-      <p:sp>
-        <p:nvSpPr>
-          <p:cNvPr id="18" name="Text 15"/>
-          <p:cNvSpPr/>
-          <p:nvPr/>
-        </p:nvSpPr>
-        <p:spPr>
-          <a:xfrm>
-            <a:off x="5440680" y="4389120"/>
-            <a:ext cx="3291840" cy="256032"/>
-          </a:xfrm>
-          <a:prstGeom prst="rect">
-            <a:avLst/>
-          </a:prstGeom>
-          <a:noFill/>
-        </p:spPr>
-        <p:txBody>
-          <a:bodyPr wrap="square" lIns="0" tIns="0" rIns="0" bIns="0" rtlCol="0" anchor="ctr"/>
-          <a:lstStyle/>
-          <a:p>
-            <a:pPr marL="0" indent="0">
-              <a:buNone/>
-            </a:pPr>
-            <a:r>
-              <a:rPr lang="en-US" sz="800" dirty="0">
-                <a:solidFill>
-                  <a:srgbClr val="90CAF9"/>
-                </a:solidFill>
-                <a:latin typeface="Calibri" panose="020F0502020204030204" pitchFamily="34" charset="0"/>
-                <a:ea typeface="Calibri" panose="020F0502020204030204" pitchFamily="34" charset="-122"/>
-                <a:cs typeface="Calibri" panose="020F0502020204030204" pitchFamily="34" charset="-120"/>
-              </a:rPr>
-              <a:t>View live map: https://github.com/codemewithc/Python-projects/blob/main/lab_jupyter_launch_site_location.ipynb</a:t>
-            </a:r>
-            <a:endParaRPr lang="en-US" sz="800" dirty="0"/>
-          </a:p>
-        </p:txBody>
-      </p:sp>
-      <p:sp>
-        <p:nvSpPr>
-          <p:cNvPr id="19" name="Text 16"/>
-          <p:cNvSpPr/>
-          <p:nvPr/>
-        </p:nvSpPr>
-        <p:spPr>
-          <a:xfrm>
-            <a:off x="274320" y="4892040"/>
-            <a:ext cx="8229600" cy="201168"/>
-          </a:xfrm>
-          <a:prstGeom prst="rect">
-            <a:avLst/>
-          </a:prstGeom>
-          <a:noFill/>
-        </p:spPr>
-        <p:txBody>
-          <a:bodyPr wrap="square" rtlCol="0" anchor="ctr"/>
-          <a:lstStyle/>
-          <a:p>
-            <a:pPr marL="0" indent="0">
-              <a:buNone/>
-            </a:pPr>
-            <a:r>
-              <a:rPr lang="en-US" sz="800" dirty="0">
-                <a:solidFill>
-                  <a:srgbClr val="546E7A"/>
-                </a:solidFill>
-                <a:latin typeface="Calibri" panose="020F0502020204030204" pitchFamily="34" charset="0"/>
-                <a:ea typeface="Calibri" panose="020F0502020204030204" pitchFamily="34" charset="-122"/>
-                <a:cs typeface="Calibri" panose="020F0502020204030204" pitchFamily="34" charset="-120"/>
-              </a:rPr>
-              <a:t>SpaceX Capstone Project  |  IBM Data Science  |  https://github.com/codemewithc/Python-projects</a:t>
-            </a:r>
-            <a:endParaRPr lang="en-US" sz="800" dirty="0"/>
-          </a:p>
-        </p:txBody>
-      </p:sp>
-      <p:sp>
-        <p:nvSpPr>
-          <p:cNvPr id="20" name="Text 17"/>
-          <p:cNvSpPr/>
-          <p:nvPr/>
-        </p:nvSpPr>
-        <p:spPr>
-          <a:xfrm>
-            <a:off x="8686800" y="4892040"/>
-            <a:ext cx="365760" cy="201168"/>
-          </a:xfrm>
-          <a:prstGeom prst="rect">
-            <a:avLst/>
-          </a:prstGeom>
-          <a:noFill/>
-        </p:spPr>
-        <p:txBody>
-          <a:bodyPr wrap="square" rtlCol="0" anchor="ctr"/>
-          <a:lstStyle/>
-          <a:p>
-            <a:pPr marL="0" indent="0" algn="r">
-              <a:buNone/>
-            </a:pPr>
-            <a:r>
-              <a:rPr lang="en-US" sz="800" dirty="0">
-                <a:solidFill>
-                  <a:srgbClr val="546E7A"/>
-                </a:solidFill>
-                <a:latin typeface="Calibri" panose="020F0502020204030204" pitchFamily="34" charset="0"/>
-                <a:ea typeface="Calibri" panose="020F0502020204030204" pitchFamily="34" charset="-122"/>
-                <a:cs typeface="Calibri" panose="020F0502020204030204" pitchFamily="34" charset="-120"/>
-              </a:rPr>
-              <a:t>9</a:t>
-            </a:r>
-            <a:endParaRPr lang="en-US" sz="800" dirty="0"/>
-          </a:p>
-        </p:txBody>
-      </p:sp>
+      <p:grpSpPr/>
+      <p:pic>
+        <p:nvPicPr>
+          <p:cNvPr id="2" name="Picture 1"/>
+          <p:cNvPicPr>
+            <a:picLocks noChangeAspect="1"/>
+          </p:cNvPicPr>
+          <p:nvPr/>
+        </p:nvPicPr>
+        <p:blipFill>
+          <a:blip r:embed="rId1"/>
+          <a:stretch>
+            <a:fillRect/>
+          </a:stretch>
+        </p:blipFill>
+        <p:spPr>
+          <a:xfrm>
+            <a:off x="-116205" y="-253365"/>
+            <a:ext cx="9366885" cy="5634990"/>
+          </a:xfrm>
+          <a:prstGeom prst="rect">
+            <a:avLst/>
+          </a:prstGeom>
+        </p:spPr>
+      </p:pic>
     </p:spTree>
   </p:cSld>
   <p:clrMapOvr>
